--- a/articles/ai-assisted-java-upgrade/AI-Assisted-Java-Upgrade-Presentation.pptx
+++ b/articles/ai-assisted-java-upgrade/AI-Assisted-Java-Upgrade-Presentation.pptx
@@ -5,7 +5,7 @@
     <p:sldMasterId id="2147483648" r:id="rId1"/>
   </p:sldMasterIdLst>
   <p:notesMasterIdLst>
-    <p:notesMasterId r:id="rId28"/>
+    <p:notesMasterId r:id="rId29"/>
   </p:notesMasterIdLst>
   <p:sldIdLst>
     <p:sldId id="256" r:id="rId2"/>
@@ -25,15 +25,16 @@
     <p:sldId id="271" r:id="rId16"/>
     <p:sldId id="268" r:id="rId17"/>
     <p:sldId id="269" r:id="rId18"/>
-    <p:sldId id="281" r:id="rId19"/>
-    <p:sldId id="270" r:id="rId20"/>
-    <p:sldId id="273" r:id="rId21"/>
-    <p:sldId id="272" r:id="rId22"/>
-    <p:sldId id="278" r:id="rId23"/>
-    <p:sldId id="274" r:id="rId24"/>
-    <p:sldId id="279" r:id="rId25"/>
-    <p:sldId id="280" r:id="rId26"/>
-    <p:sldId id="282" r:id="rId27"/>
+    <p:sldId id="270" r:id="rId19"/>
+    <p:sldId id="281" r:id="rId20"/>
+    <p:sldId id="283" r:id="rId21"/>
+    <p:sldId id="273" r:id="rId22"/>
+    <p:sldId id="272" r:id="rId23"/>
+    <p:sldId id="278" r:id="rId24"/>
+    <p:sldId id="274" r:id="rId25"/>
+    <p:sldId id="279" r:id="rId26"/>
+    <p:sldId id="280" r:id="rId27"/>
+    <p:sldId id="282" r:id="rId28"/>
   </p:sldIdLst>
   <p:sldSz cx="12192000" cy="6858000"/>
   <p:notesSz cx="6858000" cy="9144000"/>
@@ -225,7 +226,7 @@
           <a:p>
             <a:fld id="{B53EAF31-E892-BD4A-AD1D-FE5076BA26F2}" type="datetimeFigureOut">
               <a:rPr lang="en-US" smtClean="0"/>
-              <a:t>2/9/26</a:t>
+              <a:t>2/11/26</a:t>
             </a:fld>
             <a:endParaRPr lang="en-US"/>
           </a:p>
@@ -536,6 +537,10 @@
           <a:bodyPr/>
           <a:lstStyle/>
           <a:p>
+            <a:r>
+              <a:rPr lang="en-US" dirty="0"/>
+              <a:t>Some use cases of AI in day-to-day development work</a:t>
+            </a:r>
             <a:endParaRPr lang="en-GB" b="0" baseline="0" dirty="0">
               <a:latin typeface="Arial" panose="020B0604020202020204" pitchFamily="34" charset="0"/>
               <a:cs typeface="Arial" panose="020B0604020202020204" pitchFamily="34" charset="0"/>
@@ -1364,7 +1369,7 @@
         <p:cNvPr id="1" name="">
           <a:extLst>
             <a:ext uri="{FF2B5EF4-FFF2-40B4-BE49-F238E27FC236}">
-              <a16:creationId xmlns:a16="http://schemas.microsoft.com/office/drawing/2014/main" id="{241E58CD-4711-5291-142A-2344CE3E2789}"/>
+              <a16:creationId xmlns:a16="http://schemas.microsoft.com/office/drawing/2014/main" id="{B5128854-4E2B-7B67-DA31-8572EC6F4F3F}"/>
             </a:ext>
           </a:extLst>
         </p:cNvPr>
@@ -1384,7 +1389,7 @@
           <p:cNvPr id="2" name="Slide Image Placeholder 1">
             <a:extLst>
               <a:ext uri="{FF2B5EF4-FFF2-40B4-BE49-F238E27FC236}">
-                <a16:creationId xmlns:a16="http://schemas.microsoft.com/office/drawing/2014/main" id="{6B724128-446D-59C3-9E31-5CCD0113E7F6}"/>
+                <a16:creationId xmlns:a16="http://schemas.microsoft.com/office/drawing/2014/main" id="{5E692848-E723-BEEB-C1C8-6868780A9B38}"/>
               </a:ext>
             </a:extLst>
           </p:cNvPr>
@@ -1402,7 +1407,7 @@
           <p:cNvPr id="3" name="Notes Placeholder 2">
             <a:extLst>
               <a:ext uri="{FF2B5EF4-FFF2-40B4-BE49-F238E27FC236}">
-                <a16:creationId xmlns:a16="http://schemas.microsoft.com/office/drawing/2014/main" id="{23381171-AD8C-6879-B9E2-EC4272946D49}"/>
+                <a16:creationId xmlns:a16="http://schemas.microsoft.com/office/drawing/2014/main" id="{AACDC936-5608-E9CF-FE2F-3C5B4D927A27}"/>
               </a:ext>
             </a:extLst>
           </p:cNvPr>
@@ -1430,7 +1435,7 @@
           <p:cNvPr id="4" name="Slide Number Placeholder 3">
             <a:extLst>
               <a:ext uri="{FF2B5EF4-FFF2-40B4-BE49-F238E27FC236}">
-                <a16:creationId xmlns:a16="http://schemas.microsoft.com/office/drawing/2014/main" id="{9C6AB24E-A8A5-667F-88BB-3EF50049182B}"/>
+                <a16:creationId xmlns:a16="http://schemas.microsoft.com/office/drawing/2014/main" id="{43C4F807-91FB-9536-7D8E-CD852A49528F}"/>
               </a:ext>
             </a:extLst>
           </p:cNvPr>
@@ -1457,7 +1462,7 @@
     </p:spTree>
     <p:extLst>
       <p:ext uri="{BB962C8B-B14F-4D97-AF65-F5344CB8AC3E}">
-        <p14:creationId xmlns:p14="http://schemas.microsoft.com/office/powerpoint/2010/main" val="1674427013"/>
+        <p14:creationId xmlns:p14="http://schemas.microsoft.com/office/powerpoint/2010/main" val="2770892328"/>
       </p:ext>
     </p:extLst>
   </p:cSld>
@@ -1475,7 +1480,7 @@
         <p:cNvPr id="1" name="">
           <a:extLst>
             <a:ext uri="{FF2B5EF4-FFF2-40B4-BE49-F238E27FC236}">
-              <a16:creationId xmlns:a16="http://schemas.microsoft.com/office/drawing/2014/main" id="{B5128854-4E2B-7B67-DA31-8572EC6F4F3F}"/>
+              <a16:creationId xmlns:a16="http://schemas.microsoft.com/office/drawing/2014/main" id="{241E58CD-4711-5291-142A-2344CE3E2789}"/>
             </a:ext>
           </a:extLst>
         </p:cNvPr>
@@ -1495,7 +1500,7 @@
           <p:cNvPr id="2" name="Slide Image Placeholder 1">
             <a:extLst>
               <a:ext uri="{FF2B5EF4-FFF2-40B4-BE49-F238E27FC236}">
-                <a16:creationId xmlns:a16="http://schemas.microsoft.com/office/drawing/2014/main" id="{5E692848-E723-BEEB-C1C8-6868780A9B38}"/>
+                <a16:creationId xmlns:a16="http://schemas.microsoft.com/office/drawing/2014/main" id="{6B724128-446D-59C3-9E31-5CCD0113E7F6}"/>
               </a:ext>
             </a:extLst>
           </p:cNvPr>
@@ -1513,7 +1518,7 @@
           <p:cNvPr id="3" name="Notes Placeholder 2">
             <a:extLst>
               <a:ext uri="{FF2B5EF4-FFF2-40B4-BE49-F238E27FC236}">
-                <a16:creationId xmlns:a16="http://schemas.microsoft.com/office/drawing/2014/main" id="{AACDC936-5608-E9CF-FE2F-3C5B4D927A27}"/>
+                <a16:creationId xmlns:a16="http://schemas.microsoft.com/office/drawing/2014/main" id="{23381171-AD8C-6879-B9E2-EC4272946D49}"/>
               </a:ext>
             </a:extLst>
           </p:cNvPr>
@@ -1541,7 +1546,7 @@
           <p:cNvPr id="4" name="Slide Number Placeholder 3">
             <a:extLst>
               <a:ext uri="{FF2B5EF4-FFF2-40B4-BE49-F238E27FC236}">
-                <a16:creationId xmlns:a16="http://schemas.microsoft.com/office/drawing/2014/main" id="{43C4F807-91FB-9536-7D8E-CD852A49528F}"/>
+                <a16:creationId xmlns:a16="http://schemas.microsoft.com/office/drawing/2014/main" id="{9C6AB24E-A8A5-667F-88BB-3EF50049182B}"/>
               </a:ext>
             </a:extLst>
           </p:cNvPr>
@@ -1568,7 +1573,7 @@
     </p:spTree>
     <p:extLst>
       <p:ext uri="{BB962C8B-B14F-4D97-AF65-F5344CB8AC3E}">
-        <p14:creationId xmlns:p14="http://schemas.microsoft.com/office/powerpoint/2010/main" val="2770892328"/>
+        <p14:creationId xmlns:p14="http://schemas.microsoft.com/office/powerpoint/2010/main" val="1674427013"/>
       </p:ext>
     </p:extLst>
   </p:cSld>
@@ -1586,7 +1591,7 @@
         <p:cNvPr id="1" name="">
           <a:extLst>
             <a:ext uri="{FF2B5EF4-FFF2-40B4-BE49-F238E27FC236}">
-              <a16:creationId xmlns:a16="http://schemas.microsoft.com/office/drawing/2014/main" id="{8FD099C6-5F3B-7DA4-98AB-31A7C89845D3}"/>
+              <a16:creationId xmlns:a16="http://schemas.microsoft.com/office/drawing/2014/main" id="{9F16AE05-CA6C-5701-7CEC-1AB469A0D263}"/>
             </a:ext>
           </a:extLst>
         </p:cNvPr>
@@ -1606,7 +1611,7 @@
           <p:cNvPr id="2" name="Slide Image Placeholder 1">
             <a:extLst>
               <a:ext uri="{FF2B5EF4-FFF2-40B4-BE49-F238E27FC236}">
-                <a16:creationId xmlns:a16="http://schemas.microsoft.com/office/drawing/2014/main" id="{9AD449BF-396B-B1A0-83DE-65DD13EBF085}"/>
+                <a16:creationId xmlns:a16="http://schemas.microsoft.com/office/drawing/2014/main" id="{DECB4E62-D883-A65E-4CD7-880E50314416}"/>
               </a:ext>
             </a:extLst>
           </p:cNvPr>
@@ -1624,7 +1629,7 @@
           <p:cNvPr id="3" name="Notes Placeholder 2">
             <a:extLst>
               <a:ext uri="{FF2B5EF4-FFF2-40B4-BE49-F238E27FC236}">
-                <a16:creationId xmlns:a16="http://schemas.microsoft.com/office/drawing/2014/main" id="{79A71E53-8C3B-2F3B-46A2-5572A884EF84}"/>
+                <a16:creationId xmlns:a16="http://schemas.microsoft.com/office/drawing/2014/main" id="{41CD6E2E-4339-334D-22F4-5090B4372057}"/>
               </a:ext>
             </a:extLst>
           </p:cNvPr>
@@ -1652,7 +1657,7 @@
           <p:cNvPr id="4" name="Slide Number Placeholder 3">
             <a:extLst>
               <a:ext uri="{FF2B5EF4-FFF2-40B4-BE49-F238E27FC236}">
-                <a16:creationId xmlns:a16="http://schemas.microsoft.com/office/drawing/2014/main" id="{516BA50E-1D43-E9B9-8DAD-43200C81DDB1}"/>
+                <a16:creationId xmlns:a16="http://schemas.microsoft.com/office/drawing/2014/main" id="{3EA94573-F6AA-E716-860F-24604AC0E6ED}"/>
               </a:ext>
             </a:extLst>
           </p:cNvPr>
@@ -1679,7 +1684,7 @@
     </p:spTree>
     <p:extLst>
       <p:ext uri="{BB962C8B-B14F-4D97-AF65-F5344CB8AC3E}">
-        <p14:creationId xmlns:p14="http://schemas.microsoft.com/office/powerpoint/2010/main" val="3523795236"/>
+        <p14:creationId xmlns:p14="http://schemas.microsoft.com/office/powerpoint/2010/main" val="1722341570"/>
       </p:ext>
     </p:extLst>
   </p:cSld>
@@ -1756,7 +1761,79 @@
                 <a:latin typeface="Arial" panose="020B0604020202020204" pitchFamily="34" charset="0"/>
                 <a:cs typeface="Arial" panose="020B0604020202020204" pitchFamily="34" charset="0"/>
               </a:rPr>
-              <a:t>For existing projects, we can ask AI, “What improvements can be made to improve the testing?”, “This code can return up to 100 offers, are there any performance problems in this code? ”</a:t>
+              <a:t>For existing projects, we can ask AI, </a:t>
+            </a:r>
+            <a:br>
+              <a:rPr lang="en-GB" b="0" baseline="0" dirty="0">
+                <a:latin typeface="Arial" panose="020B0604020202020204" pitchFamily="34" charset="0"/>
+                <a:cs typeface="Arial" panose="020B0604020202020204" pitchFamily="34" charset="0"/>
+              </a:rPr>
+            </a:br>
+            <a:r>
+              <a:rPr lang="en-GB" b="0" baseline="0" dirty="0">
+                <a:latin typeface="Arial" panose="020B0604020202020204" pitchFamily="34" charset="0"/>
+                <a:cs typeface="Arial" panose="020B0604020202020204" pitchFamily="34" charset="0"/>
+              </a:rPr>
+              <a:t>“</a:t>
+            </a:r>
+            <a:r>
+              <a:rPr lang="en-GB" b="1" baseline="0" dirty="0">
+                <a:latin typeface="Arial" panose="020B0604020202020204" pitchFamily="34" charset="0"/>
+                <a:cs typeface="Arial" panose="020B0604020202020204" pitchFamily="34" charset="0"/>
+              </a:rPr>
+              <a:t>Too much logic present in this class</a:t>
+            </a:r>
+            <a:r>
+              <a:rPr lang="en-GB" b="0" baseline="0" dirty="0">
+                <a:latin typeface="Arial" panose="020B0604020202020204" pitchFamily="34" charset="0"/>
+                <a:cs typeface="Arial" panose="020B0604020202020204" pitchFamily="34" charset="0"/>
+              </a:rPr>
+              <a:t>. I want to use layered architecture and split the logic. Give a few ideas.”</a:t>
+            </a:r>
+            <a:br>
+              <a:rPr lang="en-GB" b="0" baseline="0" dirty="0">
+                <a:latin typeface="Arial" panose="020B0604020202020204" pitchFamily="34" charset="0"/>
+                <a:cs typeface="Arial" panose="020B0604020202020204" pitchFamily="34" charset="0"/>
+              </a:rPr>
+            </a:br>
+            <a:r>
+              <a:rPr lang="en-GB" b="0" baseline="0" dirty="0">
+                <a:latin typeface="Arial" panose="020B0604020202020204" pitchFamily="34" charset="0"/>
+                <a:cs typeface="Arial" panose="020B0604020202020204" pitchFamily="34" charset="0"/>
+              </a:rPr>
+              <a:t>“</a:t>
+            </a:r>
+            <a:r>
+              <a:rPr lang="en-GB" b="1" baseline="0" dirty="0">
+                <a:latin typeface="Arial" panose="020B0604020202020204" pitchFamily="34" charset="0"/>
+                <a:cs typeface="Arial" panose="020B0604020202020204" pitchFamily="34" charset="0"/>
+              </a:rPr>
+              <a:t>how </a:t>
+            </a:r>
+            <a:r>
+              <a:rPr lang="en-US" b="1" dirty="0"/>
+              <a:t>to improve testability of the code</a:t>
+            </a:r>
+            <a:r>
+              <a:rPr lang="en-GB" b="0" baseline="0" dirty="0">
+                <a:latin typeface="Arial" panose="020B0604020202020204" pitchFamily="34" charset="0"/>
+                <a:cs typeface="Arial" panose="020B0604020202020204" pitchFamily="34" charset="0"/>
+              </a:rPr>
+              <a:t>?”, “This code can return up to 100 offers, are there any </a:t>
+            </a:r>
+            <a:r>
+              <a:rPr lang="en-GB" b="1" baseline="0" dirty="0">
+                <a:latin typeface="Arial" panose="020B0604020202020204" pitchFamily="34" charset="0"/>
+                <a:cs typeface="Arial" panose="020B0604020202020204" pitchFamily="34" charset="0"/>
+              </a:rPr>
+              <a:t>performance problems in this code</a:t>
+            </a:r>
+            <a:r>
+              <a:rPr lang="en-GB" b="0" baseline="0" dirty="0">
+                <a:latin typeface="Arial" panose="020B0604020202020204" pitchFamily="34" charset="0"/>
+                <a:cs typeface="Arial" panose="020B0604020202020204" pitchFamily="34" charset="0"/>
+              </a:rPr>
+              <a:t>? ”</a:t>
             </a:r>
           </a:p>
           <a:p>
@@ -1901,6 +1978,117 @@
 </file>
 
 <file path=ppt/notesSlides/notesSlide20.xml><?xml version="1.0" encoding="utf-8"?>
+<p:notes xmlns:a="http://schemas.openxmlformats.org/drawingml/2006/main" xmlns:r="http://schemas.openxmlformats.org/officeDocument/2006/relationships" xmlns:p="http://schemas.openxmlformats.org/presentationml/2006/main">
+  <p:cSld>
+    <p:spTree>
+      <p:nvGrpSpPr>
+        <p:cNvPr id="1" name="">
+          <a:extLst>
+            <a:ext uri="{FF2B5EF4-FFF2-40B4-BE49-F238E27FC236}">
+              <a16:creationId xmlns:a16="http://schemas.microsoft.com/office/drawing/2014/main" id="{8FD099C6-5F3B-7DA4-98AB-31A7C89845D3}"/>
+            </a:ext>
+          </a:extLst>
+        </p:cNvPr>
+        <p:cNvGrpSpPr/>
+        <p:nvPr/>
+      </p:nvGrpSpPr>
+      <p:grpSpPr>
+        <a:xfrm>
+          <a:off x="0" y="0"/>
+          <a:ext cx="0" cy="0"/>
+          <a:chOff x="0" y="0"/>
+          <a:chExt cx="0" cy="0"/>
+        </a:xfrm>
+      </p:grpSpPr>
+      <p:sp>
+        <p:nvSpPr>
+          <p:cNvPr id="2" name="Slide Image Placeholder 1">
+            <a:extLst>
+              <a:ext uri="{FF2B5EF4-FFF2-40B4-BE49-F238E27FC236}">
+                <a16:creationId xmlns:a16="http://schemas.microsoft.com/office/drawing/2014/main" id="{9AD449BF-396B-B1A0-83DE-65DD13EBF085}"/>
+              </a:ext>
+            </a:extLst>
+          </p:cNvPr>
+          <p:cNvSpPr>
+            <a:spLocks noGrp="1" noRot="1" noChangeAspect="1"/>
+          </p:cNvSpPr>
+          <p:nvPr>
+            <p:ph type="sldImg"/>
+          </p:nvPr>
+        </p:nvSpPr>
+        <p:spPr/>
+      </p:sp>
+      <p:sp>
+        <p:nvSpPr>
+          <p:cNvPr id="3" name="Notes Placeholder 2">
+            <a:extLst>
+              <a:ext uri="{FF2B5EF4-FFF2-40B4-BE49-F238E27FC236}">
+                <a16:creationId xmlns:a16="http://schemas.microsoft.com/office/drawing/2014/main" id="{79A71E53-8C3B-2F3B-46A2-5572A884EF84}"/>
+              </a:ext>
+            </a:extLst>
+          </p:cNvPr>
+          <p:cNvSpPr>
+            <a:spLocks noGrp="1"/>
+          </p:cNvSpPr>
+          <p:nvPr>
+            <p:ph type="body" idx="1"/>
+          </p:nvPr>
+        </p:nvSpPr>
+        <p:spPr/>
+        <p:txBody>
+          <a:bodyPr/>
+          <a:lstStyle/>
+          <a:p>
+            <a:endParaRPr lang="en-GB" b="0" baseline="0" dirty="0">
+              <a:latin typeface="Arial" panose="020B0604020202020204" pitchFamily="34" charset="0"/>
+              <a:cs typeface="Arial" panose="020B0604020202020204" pitchFamily="34" charset="0"/>
+            </a:endParaRPr>
+          </a:p>
+        </p:txBody>
+      </p:sp>
+      <p:sp>
+        <p:nvSpPr>
+          <p:cNvPr id="4" name="Slide Number Placeholder 3">
+            <a:extLst>
+              <a:ext uri="{FF2B5EF4-FFF2-40B4-BE49-F238E27FC236}">
+                <a16:creationId xmlns:a16="http://schemas.microsoft.com/office/drawing/2014/main" id="{516BA50E-1D43-E9B9-8DAD-43200C81DDB1}"/>
+              </a:ext>
+            </a:extLst>
+          </p:cNvPr>
+          <p:cNvSpPr>
+            <a:spLocks noGrp="1"/>
+          </p:cNvSpPr>
+          <p:nvPr>
+            <p:ph type="sldNum" sz="quarter" idx="10"/>
+          </p:nvPr>
+        </p:nvSpPr>
+        <p:spPr/>
+        <p:txBody>
+          <a:bodyPr/>
+          <a:lstStyle/>
+          <a:p>
+            <a:fld id="{5D958377-8945-4A29-AA61-C5A798FE2322}" type="slidenum">
+              <a:rPr lang="en-GB" smtClean="0"/>
+              <a:t>21</a:t>
+            </a:fld>
+            <a:endParaRPr lang="en-GB"/>
+          </a:p>
+        </p:txBody>
+      </p:sp>
+    </p:spTree>
+    <p:extLst>
+      <p:ext uri="{BB962C8B-B14F-4D97-AF65-F5344CB8AC3E}">
+        <p14:creationId xmlns:p14="http://schemas.microsoft.com/office/powerpoint/2010/main" val="3523795236"/>
+      </p:ext>
+    </p:extLst>
+  </p:cSld>
+  <p:clrMapOvr>
+    <a:masterClrMapping/>
+  </p:clrMapOvr>
+</p:notes>
+</file>
+
+<file path=ppt/notesSlides/notesSlide21.xml><?xml version="1.0" encoding="utf-8"?>
 <p:notes xmlns:a="http://schemas.openxmlformats.org/drawingml/2006/main" xmlns:r="http://schemas.openxmlformats.org/officeDocument/2006/relationships" xmlns:p="http://schemas.openxmlformats.org/presentationml/2006/main">
   <p:cSld>
     <p:spTree>
@@ -1995,7 +2183,7 @@
           <a:p>
             <a:fld id="{5D958377-8945-4A29-AA61-C5A798FE2322}" type="slidenum">
               <a:rPr lang="en-GB" smtClean="0"/>
-              <a:t>21</a:t>
+              <a:t>22</a:t>
             </a:fld>
             <a:endParaRPr lang="en-GB"/>
           </a:p>
@@ -2014,7 +2202,7 @@
 </p:notes>
 </file>
 
-<file path=ppt/notesSlides/notesSlide21.xml><?xml version="1.0" encoding="utf-8"?>
+<file path=ppt/notesSlides/notesSlide22.xml><?xml version="1.0" encoding="utf-8"?>
 <p:notes xmlns:a="http://schemas.openxmlformats.org/drawingml/2006/main" xmlns:r="http://schemas.openxmlformats.org/officeDocument/2006/relationships" xmlns:p="http://schemas.openxmlformats.org/presentationml/2006/main">
   <p:cSld>
     <p:spTree>
@@ -2076,10 +2264,26 @@
           <a:bodyPr/>
           <a:lstStyle/>
           <a:p>
-            <a:endParaRPr lang="en-GB" b="0" baseline="0" dirty="0">
-              <a:latin typeface="Arial" panose="020B0604020202020204" pitchFamily="34" charset="0"/>
-              <a:cs typeface="Arial" panose="020B0604020202020204" pitchFamily="34" charset="0"/>
-            </a:endParaRPr>
+            <a:r>
+              <a:rPr lang="en-GB" b="0" baseline="0" dirty="0">
+                <a:latin typeface="Arial" panose="020B0604020202020204" pitchFamily="34" charset="0"/>
+                <a:cs typeface="Arial" panose="020B0604020202020204" pitchFamily="34" charset="0"/>
+              </a:rPr>
+              <a:t>Even if developers review thoroughly, AI still saves lot of time.</a:t>
+            </a:r>
+            <a:br>
+              <a:rPr lang="en-GB" b="0" baseline="0" dirty="0">
+                <a:latin typeface="Arial" panose="020B0604020202020204" pitchFamily="34" charset="0"/>
+                <a:cs typeface="Arial" panose="020B0604020202020204" pitchFamily="34" charset="0"/>
+              </a:rPr>
+            </a:br>
+            <a:r>
+              <a:rPr lang="en-GB" b="1" baseline="0" dirty="0">
+                <a:latin typeface="Arial" panose="020B0604020202020204" pitchFamily="34" charset="0"/>
+                <a:cs typeface="Arial" panose="020B0604020202020204" pitchFamily="34" charset="0"/>
+              </a:rPr>
+              <a:t>If we generate a script to automate this whole process without AI, it could have taken couple of sprints for a developer.</a:t>
+            </a:r>
           </a:p>
         </p:txBody>
       </p:sp>
@@ -2106,7 +2310,7 @@
           <a:p>
             <a:fld id="{5D958377-8945-4A29-AA61-C5A798FE2322}" type="slidenum">
               <a:rPr lang="en-GB" smtClean="0"/>
-              <a:t>22</a:t>
+              <a:t>23</a:t>
             </a:fld>
             <a:endParaRPr lang="en-GB"/>
           </a:p>
@@ -2125,7 +2329,7 @@
 </p:notes>
 </file>
 
-<file path=ppt/notesSlides/notesSlide22.xml><?xml version="1.0" encoding="utf-8"?>
+<file path=ppt/notesSlides/notesSlide23.xml><?xml version="1.0" encoding="utf-8"?>
 <p:notes xmlns:a="http://schemas.openxmlformats.org/drawingml/2006/main" xmlns:r="http://schemas.openxmlformats.org/officeDocument/2006/relationships" xmlns:p="http://schemas.openxmlformats.org/presentationml/2006/main">
   <p:cSld>
     <p:spTree>
@@ -2217,7 +2421,7 @@
           <a:p>
             <a:fld id="{5D958377-8945-4A29-AA61-C5A798FE2322}" type="slidenum">
               <a:rPr lang="en-GB" smtClean="0"/>
-              <a:t>23</a:t>
+              <a:t>24</a:t>
             </a:fld>
             <a:endParaRPr lang="en-GB"/>
           </a:p>
@@ -2236,7 +2440,7 @@
 </p:notes>
 </file>
 
-<file path=ppt/notesSlides/notesSlide23.xml><?xml version="1.0" encoding="utf-8"?>
+<file path=ppt/notesSlides/notesSlide24.xml><?xml version="1.0" encoding="utf-8"?>
 <p:notes xmlns:a="http://schemas.openxmlformats.org/drawingml/2006/main" xmlns:r="http://schemas.openxmlformats.org/officeDocument/2006/relationships" xmlns:p="http://schemas.openxmlformats.org/presentationml/2006/main">
   <p:cSld>
     <p:spTree>
@@ -2328,7 +2532,7 @@
           <a:p>
             <a:fld id="{5D958377-8945-4A29-AA61-C5A798FE2322}" type="slidenum">
               <a:rPr lang="en-GB" smtClean="0"/>
-              <a:t>24</a:t>
+              <a:t>25</a:t>
             </a:fld>
             <a:endParaRPr lang="en-GB"/>
           </a:p>
@@ -2347,7 +2551,7 @@
 </p:notes>
 </file>
 
-<file path=ppt/notesSlides/notesSlide24.xml><?xml version="1.0" encoding="utf-8"?>
+<file path=ppt/notesSlides/notesSlide25.xml><?xml version="1.0" encoding="utf-8"?>
 <p:notes xmlns:a="http://schemas.openxmlformats.org/drawingml/2006/main" xmlns:r="http://schemas.openxmlformats.org/officeDocument/2006/relationships" xmlns:p="http://schemas.openxmlformats.org/presentationml/2006/main">
   <p:cSld>
     <p:spTree>
@@ -2491,7 +2695,7 @@
           <a:p>
             <a:fld id="{5D958377-8945-4A29-AA61-C5A798FE2322}" type="slidenum">
               <a:rPr lang="en-GB" smtClean="0"/>
-              <a:t>25</a:t>
+              <a:t>26</a:t>
             </a:fld>
             <a:endParaRPr lang="en-GB"/>
           </a:p>
@@ -2510,7 +2714,7 @@
 </p:notes>
 </file>
 
-<file path=ppt/notesSlides/notesSlide25.xml><?xml version="1.0" encoding="utf-8"?>
+<file path=ppt/notesSlides/notesSlide26.xml><?xml version="1.0" encoding="utf-8"?>
 <p:notes xmlns:a="http://schemas.openxmlformats.org/drawingml/2006/main" xmlns:r="http://schemas.openxmlformats.org/officeDocument/2006/relationships" xmlns:p="http://schemas.openxmlformats.org/presentationml/2006/main">
   <p:cSld>
     <p:spTree>
@@ -2602,7 +2806,7 @@
           <a:p>
             <a:fld id="{5D958377-8945-4A29-AA61-C5A798FE2322}" type="slidenum">
               <a:rPr lang="en-GB" smtClean="0"/>
-              <a:t>26</a:t>
+              <a:t>27</a:t>
             </a:fld>
             <a:endParaRPr lang="en-GB"/>
           </a:p>
@@ -2688,16 +2892,44 @@
                 <a:latin typeface="Arial" panose="020B0604020202020204" pitchFamily="34" charset="0"/>
                 <a:cs typeface="Arial" panose="020B0604020202020204" pitchFamily="34" charset="0"/>
               </a:rPr>
-              <a:t>This is similar to generating unit test cases with AI.</a:t>
-            </a:r>
-          </a:p>
-          <a:p>
+              <a:t>This is </a:t>
+            </a:r>
+            <a:r>
+              <a:rPr lang="en-GB" b="1" baseline="0" dirty="0">
+                <a:latin typeface="Arial" panose="020B0604020202020204" pitchFamily="34" charset="0"/>
+                <a:cs typeface="Arial" panose="020B0604020202020204" pitchFamily="34" charset="0"/>
+              </a:rPr>
+              <a:t>similar to generating unit test cases with AI</a:t>
+            </a:r>
             <a:r>
               <a:rPr lang="en-GB" b="0" baseline="0" dirty="0">
                 <a:latin typeface="Arial" panose="020B0604020202020204" pitchFamily="34" charset="0"/>
                 <a:cs typeface="Arial" panose="020B0604020202020204" pitchFamily="34" charset="0"/>
               </a:rPr>
-              <a:t>We can write one line prompt to add unit tests.</a:t>
+              <a:t>.</a:t>
+            </a:r>
+          </a:p>
+          <a:p>
+            <a:r>
+              <a:rPr lang="en-GB" b="0" baseline="0" dirty="0">
+                <a:latin typeface="Arial" panose="020B0604020202020204" pitchFamily="34" charset="0"/>
+                <a:cs typeface="Arial" panose="020B0604020202020204" pitchFamily="34" charset="0"/>
+              </a:rPr>
+              <a:t>We can </a:t>
+            </a:r>
+            <a:r>
+              <a:rPr lang="en-GB" b="1" baseline="0" dirty="0">
+                <a:latin typeface="Arial" panose="020B0604020202020204" pitchFamily="34" charset="0"/>
+                <a:cs typeface="Arial" panose="020B0604020202020204" pitchFamily="34" charset="0"/>
+              </a:rPr>
+              <a:t>write one line prompt to add unit tests</a:t>
+            </a:r>
+            <a:r>
+              <a:rPr lang="en-GB" b="0" baseline="0" dirty="0">
+                <a:latin typeface="Arial" panose="020B0604020202020204" pitchFamily="34" charset="0"/>
+                <a:cs typeface="Arial" panose="020B0604020202020204" pitchFamily="34" charset="0"/>
+              </a:rPr>
+              <a:t>.</a:t>
             </a:r>
             <a:br>
               <a:rPr lang="en-GB" b="0" baseline="0" dirty="0">
@@ -2710,7 +2942,21 @@
                 <a:latin typeface="Arial" panose="020B0604020202020204" pitchFamily="34" charset="0"/>
                 <a:cs typeface="Arial" panose="020B0604020202020204" pitchFamily="34" charset="0"/>
               </a:rPr>
-              <a:t>But if we want to follow the industry best practices, then it takes couple of weeks to create instructions with many examples (examples for the right way and wrong way). </a:t>
+              <a:t>But if we want to follow the </a:t>
+            </a:r>
+            <a:r>
+              <a:rPr lang="en-GB" b="1" baseline="0" dirty="0">
+                <a:latin typeface="Arial" panose="020B0604020202020204" pitchFamily="34" charset="0"/>
+                <a:cs typeface="Arial" panose="020B0604020202020204" pitchFamily="34" charset="0"/>
+              </a:rPr>
+              <a:t>best practices, maintainability</a:t>
+            </a:r>
+            <a:r>
+              <a:rPr lang="en-GB" b="0" baseline="0" dirty="0">
+                <a:latin typeface="Arial" panose="020B0604020202020204" pitchFamily="34" charset="0"/>
+                <a:cs typeface="Arial" panose="020B0604020202020204" pitchFamily="34" charset="0"/>
+              </a:rPr>
+              <a:t>, then it takes couple of weeks to create instructions with many examples (examples for the right way and wrong way). </a:t>
             </a:r>
             <a:br>
               <a:rPr lang="en-GB" b="0" baseline="0" dirty="0">
@@ -2719,11 +2965,18 @@
               </a:rPr>
             </a:br>
             <a:r>
+              <a:rPr lang="en-GB" b="1" baseline="0" dirty="0">
+                <a:latin typeface="Arial" panose="020B0604020202020204" pitchFamily="34" charset="0"/>
+                <a:cs typeface="Arial" panose="020B0604020202020204" pitchFamily="34" charset="0"/>
+              </a:rPr>
+              <a:t>Software engineering at Google</a:t>
+            </a:r>
+            <a:r>
               <a:rPr lang="en-GB" b="0" baseline="0" dirty="0">
                 <a:latin typeface="Arial" panose="020B0604020202020204" pitchFamily="34" charset="0"/>
                 <a:cs typeface="Arial" panose="020B0604020202020204" pitchFamily="34" charset="0"/>
               </a:rPr>
-              <a:t>Software engineering at Google. There are three chapters on how testing is done by Google developers.</a:t>
+              <a:t>. There are three chapters on how testing is done by Google developers.</a:t>
             </a:r>
           </a:p>
         </p:txBody>
@@ -2961,7 +3214,7 @@
                   </a:schemeClr>
                 </a:solidFill>
               </a:rPr>
-              <a:t>UpgradeToJava17 has multiple other recipes</a:t>
+              <a:t>UpgradeToJava21 has multiple other recipes</a:t>
             </a:r>
             <a:endParaRPr lang="en-GB" b="0" baseline="0" dirty="0">
               <a:latin typeface="Arial" panose="020B0604020202020204" pitchFamily="34" charset="0"/>
@@ -3091,55 +3344,6 @@
               <a:tabLst/>
               <a:defRPr/>
             </a:pPr>
-            <a:r>
-              <a:rPr lang="en-GB" b="1" baseline="0" dirty="0">
-                <a:solidFill>
-                  <a:schemeClr val="accent2">
-                    <a:lumMod val="75000"/>
-                  </a:schemeClr>
-                </a:solidFill>
-                <a:latin typeface="Arial" panose="020B0604020202020204" pitchFamily="34" charset="0"/>
-                <a:cs typeface="Arial" panose="020B0604020202020204" pitchFamily="34" charset="0"/>
-              </a:rPr>
-              <a:t>The recipe </a:t>
-            </a:r>
-            <a:r>
-              <a:rPr lang="en-US" sz="1200" b="1" dirty="0" err="1">
-                <a:solidFill>
-                  <a:schemeClr val="accent2">
-                    <a:lumMod val="75000"/>
-                  </a:schemeClr>
-                </a:solidFill>
-                <a:latin typeface=""/>
-              </a:rPr>
-              <a:t>org.openrewrite.java.migrate.SwitchPatternMatching</a:t>
-            </a:r>
-            <a:r>
-              <a:rPr lang="en-US" sz="1200" b="1" dirty="0">
-                <a:solidFill>
-                  <a:schemeClr val="accent2">
-                    <a:lumMod val="75000"/>
-                  </a:schemeClr>
-                </a:solidFill>
-                <a:latin typeface=""/>
-              </a:rPr>
-              <a:t> is not required.</a:t>
-            </a:r>
-            <a:r>
-              <a:rPr lang="en-US" sz="1200" dirty="0">
-                <a:latin typeface=""/>
-              </a:rPr>
-              <a:t> </a:t>
-            </a:r>
-          </a:p>
-          <a:p>
-            <a:r>
-              <a:rPr lang="en-GB" b="0" baseline="0" dirty="0">
-                <a:latin typeface="Arial" panose="020B0604020202020204" pitchFamily="34" charset="0"/>
-                <a:cs typeface="Arial" panose="020B0604020202020204" pitchFamily="34" charset="0"/>
-              </a:rPr>
-              <a:t>The presenter tried to show another recipe not included in UpgradeToJava21. But it is already included.</a:t>
-            </a:r>
             <a:br>
               <a:rPr lang="en-GB" b="0" baseline="0" dirty="0">
                 <a:latin typeface="Arial" panose="020B0604020202020204" pitchFamily="34" charset="0"/>
@@ -3567,6 +3771,44 @@
             <a:r>
               <a:rPr lang="en-US" dirty="0"/>
               <a:t> that tools like Amazon Q</a:t>
+            </a:r>
+          </a:p>
+          <a:p>
+            <a:r>
+              <a:rPr lang="en-US" b="0" baseline="0" dirty="0">
+                <a:latin typeface="Arial" panose="020B0604020202020204" pitchFamily="34" charset="0"/>
+                <a:cs typeface="Arial" panose="020B0604020202020204" pitchFamily="34" charset="0"/>
+              </a:rPr>
+              <a:t>We can mix match the approaches. For e.g. for Python project:</a:t>
+            </a:r>
+            <a:br>
+              <a:rPr lang="en-US" b="0" baseline="0" dirty="0">
+                <a:latin typeface="Arial" panose="020B0604020202020204" pitchFamily="34" charset="0"/>
+                <a:cs typeface="Arial" panose="020B0604020202020204" pitchFamily="34" charset="0"/>
+              </a:rPr>
+            </a:br>
+            <a:r>
+              <a:rPr lang="en-US" b="0" baseline="0" dirty="0">
+                <a:latin typeface="Arial" panose="020B0604020202020204" pitchFamily="34" charset="0"/>
+                <a:cs typeface="Arial" panose="020B0604020202020204" pitchFamily="34" charset="0"/>
+              </a:rPr>
+              <a:t>1. </a:t>
+            </a:r>
+            <a:r>
+              <a:rPr lang="en-US" b="1" baseline="0" dirty="0">
+                <a:latin typeface="Arial" panose="020B0604020202020204" pitchFamily="34" charset="0"/>
+                <a:cs typeface="Arial" panose="020B0604020202020204" pitchFamily="34" charset="0"/>
+              </a:rPr>
+              <a:t>Use only AI agent and custom instructions</a:t>
+            </a:r>
+          </a:p>
+          <a:p>
+            <a:r>
+              <a:rPr lang="en-US" b="0" baseline="0" dirty="0">
+                <a:latin typeface="Arial" panose="020B0604020202020204" pitchFamily="34" charset="0"/>
+                <a:cs typeface="Arial" panose="020B0604020202020204" pitchFamily="34" charset="0"/>
+              </a:rPr>
+              <a:t>2. Use only custom instructions</a:t>
             </a:r>
             <a:endParaRPr lang="en-GB" b="0" baseline="0" dirty="0">
               <a:latin typeface="Arial" panose="020B0604020202020204" pitchFamily="34" charset="0"/>
@@ -4395,7 +4637,7 @@
           <a:p>
             <a:fld id="{2558DA4E-9102-8846-8A07-CB076FB7D4EF}" type="datetime1">
               <a:rPr lang="en-US" smtClean="0"/>
-              <a:t>2/9/26</a:t>
+              <a:t>2/11/26</a:t>
             </a:fld>
             <a:endParaRPr lang="en-US" dirty="0"/>
           </a:p>
@@ -4642,7 +4884,7 @@
           <a:p>
             <a:fld id="{C314723F-2F4B-0141-BBDF-DDE174A90A1B}" type="datetime1">
               <a:rPr lang="en-US" smtClean="0"/>
-              <a:t>2/9/26</a:t>
+              <a:t>2/11/26</a:t>
             </a:fld>
             <a:endParaRPr lang="en-US" dirty="0"/>
           </a:p>
@@ -4952,7 +5194,7 @@
           <a:p>
             <a:fld id="{E7F43499-912D-B442-A7AB-B463AF045ECA}" type="datetime1">
               <a:rPr lang="en-US" smtClean="0"/>
-              <a:t>2/9/26</a:t>
+              <a:t>2/11/26</a:t>
             </a:fld>
             <a:endParaRPr lang="en-US" dirty="0"/>
           </a:p>
@@ -5289,7 +5531,7 @@
           <a:p>
             <a:fld id="{9D600687-B64B-3148-B3B5-B0745D4EE20F}" type="datetime1">
               <a:rPr lang="en-US" smtClean="0"/>
-              <a:t>2/9/26</a:t>
+              <a:t>2/11/26</a:t>
             </a:fld>
             <a:endParaRPr lang="en-US" dirty="0"/>
           </a:p>
@@ -5599,7 +5841,7 @@
           <a:p>
             <a:fld id="{20E42F97-DFEE-A949-95A0-A9B4DD8AA3EC}" type="datetime1">
               <a:rPr lang="en-US" smtClean="0"/>
-              <a:t>2/9/26</a:t>
+              <a:t>2/11/26</a:t>
             </a:fld>
             <a:endParaRPr lang="en-US" dirty="0"/>
           </a:p>
@@ -5988,7 +6230,7 @@
           <a:p>
             <a:fld id="{835FDA3D-EC4F-804C-B2D6-3D966C689C7C}" type="datetime1">
               <a:rPr lang="en-US" smtClean="0"/>
-              <a:t>2/9/26</a:t>
+              <a:t>2/11/26</a:t>
             </a:fld>
             <a:endParaRPr lang="en-US" dirty="0"/>
           </a:p>
@@ -6154,7 +6396,7 @@
           <a:p>
             <a:fld id="{51F1CB4A-2909-A44B-BA32-D1F2D9CF4C7E}" type="datetime1">
               <a:rPr lang="en-US" smtClean="0"/>
-              <a:t>2/9/26</a:t>
+              <a:t>2/11/26</a:t>
             </a:fld>
             <a:endParaRPr lang="en-US" dirty="0"/>
           </a:p>
@@ -6329,7 +6571,7 @@
           <a:p>
             <a:fld id="{D4BC75A1-EA02-544F-820B-2CF18DB4A70B}" type="datetime1">
               <a:rPr lang="en-US" smtClean="0"/>
-              <a:t>2/9/26</a:t>
+              <a:t>2/11/26</a:t>
             </a:fld>
             <a:endParaRPr lang="en-US" dirty="0"/>
           </a:p>
@@ -6720,7 +6962,7 @@
           <a:p>
             <a:fld id="{5F62FDEB-9A7F-F844-9350-A7247DF15FB1}" type="datetime1">
               <a:rPr lang="en-US" smtClean="0"/>
-              <a:t>2/9/26</a:t>
+              <a:t>2/11/26</a:t>
             </a:fld>
             <a:endParaRPr lang="en-US" dirty="0"/>
           </a:p>
@@ -6948,7 +7190,7 @@
           <a:p>
             <a:fld id="{10D40CD2-DEB6-274C-A4AD-01F641434204}" type="datetime1">
               <a:rPr lang="en-US" smtClean="0"/>
-              <a:t>2/9/26</a:t>
+              <a:t>2/11/26</a:t>
             </a:fld>
             <a:endParaRPr lang="en-US" dirty="0"/>
           </a:p>
@@ -7317,7 +7559,7 @@
           <a:p>
             <a:fld id="{0034EFFE-3ABE-9B46-98B5-6BD487E20557}" type="datetime1">
               <a:rPr lang="en-US" smtClean="0"/>
-              <a:t>2/9/26</a:t>
+              <a:t>2/11/26</a:t>
             </a:fld>
             <a:endParaRPr lang="en-US" dirty="0"/>
           </a:p>
@@ -7436,7 +7678,7 @@
           <a:p>
             <a:fld id="{66E82423-071D-5444-B95F-BFB1C11CF8C2}" type="datetime1">
               <a:rPr lang="en-US" smtClean="0"/>
-              <a:t>2/9/26</a:t>
+              <a:t>2/11/26</a:t>
             </a:fld>
             <a:endParaRPr lang="en-US" dirty="0"/>
           </a:p>
@@ -7527,7 +7769,7 @@
           <a:p>
             <a:fld id="{176618F7-0F82-8C44-8DB9-EAACE38C7A28}" type="datetime1">
               <a:rPr lang="en-US" smtClean="0"/>
-              <a:t>2/9/26</a:t>
+              <a:t>2/11/26</a:t>
             </a:fld>
             <a:endParaRPr lang="en-US" dirty="0"/>
           </a:p>
@@ -7778,7 +8020,7 @@
           <a:p>
             <a:fld id="{53BBF730-2437-F24C-A573-A723E1C02EC6}" type="datetime1">
               <a:rPr lang="en-US" smtClean="0"/>
-              <a:t>2/9/26</a:t>
+              <a:t>2/11/26</a:t>
             </a:fld>
             <a:endParaRPr lang="en-US" dirty="0"/>
           </a:p>
@@ -8036,7 +8278,7 @@
           <a:p>
             <a:fld id="{CB0969B4-94EF-4548-A976-E821AF13D2CC}" type="datetime1">
               <a:rPr lang="en-US" smtClean="0"/>
-              <a:t>2/9/26</a:t>
+              <a:t>2/11/26</a:t>
             </a:fld>
             <a:endParaRPr lang="en-US" dirty="0"/>
           </a:p>
@@ -8831,7 +9073,7 @@
           <a:p>
             <a:fld id="{BFCC8043-76E4-914B-B9CB-3C534DE79F25}" type="datetime1">
               <a:rPr lang="en-US" smtClean="0"/>
-              <a:t>2/9/26</a:t>
+              <a:t>2/11/26</a:t>
             </a:fld>
             <a:endParaRPr lang="en-US" dirty="0"/>
           </a:p>
@@ -9561,7 +9803,17 @@
             </a:pPr>
             <a:r>
               <a:rPr lang="en-GB" sz="1800" dirty="0"/>
-              <a:t>Use Open Rewrite for deterministic changes</a:t>
+              <a:t>Use Open Rewrite for </a:t>
+            </a:r>
+            <a:r>
+              <a:rPr lang="en-GB" sz="1800" b="1" dirty="0">
+                <a:solidFill>
+                  <a:schemeClr val="accent2">
+                    <a:lumMod val="75000"/>
+                  </a:schemeClr>
+                </a:solidFill>
+              </a:rPr>
+              <a:t>deterministic changes</a:t>
             </a:r>
           </a:p>
           <a:p>
@@ -10996,8 +11248,12 @@
               <a:buChar char="v"/>
             </a:pPr>
             <a:r>
+              <a:rPr lang="en-GB" b="1" dirty="0"/>
+              <a:t>Maven needs change </a:t>
+            </a:r>
+            <a:r>
               <a:rPr lang="en-GB" dirty="0"/>
-              <a:t>Maven needs change in instruction file</a:t>
+              <a:t>in instruction file</a:t>
             </a:r>
           </a:p>
           <a:p>
@@ -11016,11 +11272,23 @@
               <a:buChar char="v"/>
             </a:pPr>
             <a:r>
-              <a:rPr lang="en-GB" dirty="0"/>
+              <a:rPr lang="en-GB" b="1" dirty="0">
+                <a:solidFill>
+                  <a:schemeClr val="accent2">
+                    <a:lumMod val="75000"/>
+                  </a:schemeClr>
+                </a:solidFill>
+              </a:rPr>
               <a:t>Amazon </a:t>
             </a:r>
             <a:r>
-              <a:rPr lang="en-GB" dirty="0" err="1"/>
+              <a:rPr lang="en-GB" b="1" dirty="0" err="1">
+                <a:solidFill>
+                  <a:schemeClr val="accent2">
+                    <a:lumMod val="75000"/>
+                  </a:schemeClr>
+                </a:solidFill>
+              </a:rPr>
               <a:t>Corretto</a:t>
             </a:r>
             <a:r>
@@ -11055,7 +11323,75 @@
               <a:buChar char="v"/>
             </a:pPr>
             <a:r>
+              <a:rPr lang="en-GB" dirty="0">
+                <a:solidFill>
+                  <a:schemeClr val="accent2">
+                    <a:lumMod val="75000"/>
+                  </a:schemeClr>
+                </a:solidFill>
+              </a:rPr>
+              <a:t>Google-Java-Formatter</a:t>
+            </a:r>
+          </a:p>
+          <a:p>
+            <a:pPr lvl="1">
+              <a:buFont typeface="Wingdings" pitchFamily="2" charset="2"/>
+              <a:buChar char="v"/>
+            </a:pPr>
+            <a:r>
+              <a:rPr lang="en-GB" dirty="0">
+                <a:solidFill>
+                  <a:schemeClr val="accent2">
+                    <a:lumMod val="75000"/>
+                  </a:schemeClr>
+                </a:solidFill>
+              </a:rPr>
+              <a:t>If teams want </a:t>
+            </a:r>
+            <a:r>
+              <a:rPr lang="en-GB" b="1" dirty="0">
+                <a:solidFill>
+                  <a:schemeClr val="accent2">
+                    <a:lumMod val="75000"/>
+                  </a:schemeClr>
+                </a:solidFill>
+              </a:rPr>
+              <a:t>Palantir</a:t>
+            </a:r>
+            <a:r>
+              <a:rPr lang="en-GB" dirty="0">
+                <a:solidFill>
+                  <a:schemeClr val="accent2">
+                    <a:lumMod val="75000"/>
+                  </a:schemeClr>
+                </a:solidFill>
+              </a:rPr>
+              <a:t> change the instructions</a:t>
+            </a:r>
+          </a:p>
+          <a:p>
+            <a:pPr>
+              <a:buFont typeface="Wingdings" pitchFamily="2" charset="2"/>
+              <a:buChar char="v"/>
+            </a:pPr>
+            <a:r>
               <a:rPr lang="en-GB" dirty="0"/>
+              <a:t>Spring Boot is not upgraded, unless it is required for Java upgrade</a:t>
+            </a:r>
+          </a:p>
+          <a:p>
+            <a:pPr>
+              <a:buFont typeface="Wingdings" pitchFamily="2" charset="2"/>
+              <a:buChar char="v"/>
+            </a:pPr>
+            <a:r>
+              <a:rPr lang="en-GB" b="1" dirty="0">
+                <a:solidFill>
+                  <a:schemeClr val="accent2">
+                    <a:lumMod val="75000"/>
+                  </a:schemeClr>
+                </a:solidFill>
+              </a:rPr>
               <a:t>If instruction file is written to include maven, the instruction file becomes a bit messy</a:t>
             </a:r>
           </a:p>
@@ -11325,7 +11661,7 @@
             </a:r>
             <a:r>
               <a:rPr lang="en-US" dirty="0"/>
-              <a:t> plugin</a:t>
+              <a:t> plugin – If not present</a:t>
             </a:r>
           </a:p>
           <a:p>
@@ -11662,7 +11998,21 @@
             </a:r>
             <a:r>
               <a:rPr lang="en-US" dirty="0"/>
-              <a:t> - Researches solutions from official Java documentation, Stack Overflow, and technical resources</a:t>
+              <a:t> - Researches solutions from official </a:t>
+            </a:r>
+            <a:r>
+              <a:rPr lang="en-US" b="1" dirty="0">
+                <a:solidFill>
+                  <a:schemeClr val="accent2">
+                    <a:lumMod val="75000"/>
+                  </a:schemeClr>
+                </a:solidFill>
+              </a:rPr>
+              <a:t>Java documentation, Stack Overflow</a:t>
+            </a:r>
+            <a:r>
+              <a:rPr lang="en-US" dirty="0"/>
+              <a:t>, and technical resources</a:t>
             </a:r>
           </a:p>
           <a:p>
@@ -11847,6 +12197,346 @@
 </file>
 
 <file path=ppt/slides/slide18.xml><?xml version="1.0" encoding="utf-8"?>
+<p:sld xmlns:a="http://schemas.openxmlformats.org/drawingml/2006/main" xmlns:r="http://schemas.openxmlformats.org/officeDocument/2006/relationships" xmlns:p="http://schemas.openxmlformats.org/presentationml/2006/main">
+  <p:cSld>
+    <p:spTree>
+      <p:nvGrpSpPr>
+        <p:cNvPr id="1" name="">
+          <a:extLst>
+            <a:ext uri="{FF2B5EF4-FFF2-40B4-BE49-F238E27FC236}">
+              <a16:creationId xmlns:a16="http://schemas.microsoft.com/office/drawing/2014/main" id="{1923DE13-732F-71B3-4ED8-3D1287AB2D29}"/>
+            </a:ext>
+          </a:extLst>
+        </p:cNvPr>
+        <p:cNvGrpSpPr/>
+        <p:nvPr/>
+      </p:nvGrpSpPr>
+      <p:grpSpPr>
+        <a:xfrm>
+          <a:off x="0" y="0"/>
+          <a:ext cx="0" cy="0"/>
+          <a:chOff x="0" y="0"/>
+          <a:chExt cx="0" cy="0"/>
+        </a:xfrm>
+      </p:grpSpPr>
+      <p:sp>
+        <p:nvSpPr>
+          <p:cNvPr id="8" name="Content Placeholder 7">
+            <a:extLst>
+              <a:ext uri="{FF2B5EF4-FFF2-40B4-BE49-F238E27FC236}">
+                <a16:creationId xmlns:a16="http://schemas.microsoft.com/office/drawing/2014/main" id="{18E8C7AC-D174-F563-E707-249EA075DFDC}"/>
+              </a:ext>
+            </a:extLst>
+          </p:cNvPr>
+          <p:cNvSpPr>
+            <a:spLocks noGrp="1"/>
+          </p:cNvSpPr>
+          <p:nvPr>
+            <p:ph idx="1"/>
+          </p:nvPr>
+        </p:nvSpPr>
+        <p:spPr>
+          <a:xfrm>
+            <a:off x="467999" y="1043611"/>
+            <a:ext cx="10644501" cy="5362876"/>
+          </a:xfrm>
+        </p:spPr>
+        <p:txBody>
+          <a:bodyPr>
+            <a:normAutofit/>
+          </a:bodyPr>
+          <a:lstStyle/>
+          <a:p>
+            <a:pPr>
+              <a:buFont typeface="Wingdings" pitchFamily="2" charset="2"/>
+              <a:buChar char="v"/>
+            </a:pPr>
+            <a:r>
+              <a:rPr lang="en-US" dirty="0"/>
+              <a:t>Copy the AI Instructions from </a:t>
+            </a:r>
+            <a:r>
+              <a:rPr lang="en-US" dirty="0" err="1"/>
+              <a:t>Github</a:t>
+            </a:r>
+            <a:r>
+              <a:rPr lang="en-US" dirty="0"/>
+              <a:t> to the to be upgraded Git repo</a:t>
+            </a:r>
+          </a:p>
+          <a:p>
+            <a:pPr lvl="1">
+              <a:buFont typeface="Wingdings" pitchFamily="2" charset="2"/>
+              <a:buChar char="v"/>
+            </a:pPr>
+            <a:r>
+              <a:rPr lang="en-US" dirty="0"/>
+              <a:t>URL Java 17 to 21: </a:t>
+            </a:r>
+            <a:r>
+              <a:rPr lang="en-US" dirty="0">
+                <a:hlinkClick r:id="rId3"/>
+              </a:rPr>
+              <a:t>https://github.com/sri-chalam/ai-tech-notes/blob/main/articles/ai-assisted-java-upgrade/java-17-to-21/instructions/java-17-to-21-upgrade-instructions.md</a:t>
+            </a:r>
+            <a:endParaRPr lang="en-US" dirty="0"/>
+          </a:p>
+          <a:p>
+            <a:pPr lvl="1">
+              <a:buFont typeface="Wingdings" pitchFamily="2" charset="2"/>
+              <a:buChar char="v"/>
+            </a:pPr>
+            <a:r>
+              <a:rPr lang="en-US" dirty="0"/>
+              <a:t>URL Java 21 to 25: </a:t>
+            </a:r>
+            <a:r>
+              <a:rPr lang="en-US" dirty="0">
+                <a:hlinkClick r:id="rId4"/>
+              </a:rPr>
+              <a:t>https://github.com/sri-chalam/ai-tech-notes/blob/main/articles/ai-assisted-java-upgrade/java-21-to-25/instructions/java-21-to-25-upgrade-instructions.md</a:t>
+            </a:r>
+            <a:endParaRPr lang="en-US" dirty="0"/>
+          </a:p>
+          <a:p>
+            <a:pPr lvl="1">
+              <a:buFont typeface="Wingdings" pitchFamily="2" charset="2"/>
+              <a:buChar char="v"/>
+            </a:pPr>
+            <a:r>
+              <a:rPr lang="en-US" dirty="0"/>
+              <a:t>Suggested directory to copy in laptop:</a:t>
+            </a:r>
+          </a:p>
+          <a:p>
+            <a:pPr lvl="2">
+              <a:buFont typeface="Wingdings" pitchFamily="2" charset="2"/>
+              <a:buChar char="v"/>
+            </a:pPr>
+            <a:r>
+              <a:rPr lang="en-US" dirty="0"/>
+              <a:t>&lt;Git repo root&gt;/docs/ai-tasks/instructions/</a:t>
+            </a:r>
+          </a:p>
+          <a:p>
+            <a:pPr>
+              <a:buFont typeface="Wingdings" pitchFamily="2" charset="2"/>
+              <a:buChar char="v"/>
+            </a:pPr>
+            <a:r>
+              <a:rPr lang="en-US" dirty="0"/>
+              <a:t>LLM prompt to kick off the upgrade</a:t>
+            </a:r>
+          </a:p>
+          <a:p>
+            <a:pPr>
+              <a:buFont typeface="Wingdings" pitchFamily="2" charset="2"/>
+              <a:buChar char="v"/>
+            </a:pPr>
+            <a:endParaRPr lang="en-US" dirty="0"/>
+          </a:p>
+          <a:p>
+            <a:pPr>
+              <a:buFont typeface="Wingdings" pitchFamily="2" charset="2"/>
+              <a:buChar char="v"/>
+            </a:pPr>
+            <a:endParaRPr lang="en-US" dirty="0"/>
+          </a:p>
+          <a:p>
+            <a:pPr>
+              <a:buFont typeface="Wingdings" pitchFamily="2" charset="2"/>
+              <a:buChar char="v"/>
+            </a:pPr>
+            <a:endParaRPr lang="en-US" dirty="0"/>
+          </a:p>
+          <a:p>
+            <a:pPr>
+              <a:buFont typeface="Wingdings" pitchFamily="2" charset="2"/>
+              <a:buChar char="v"/>
+            </a:pPr>
+            <a:endParaRPr lang="en-US" dirty="0"/>
+          </a:p>
+          <a:p>
+            <a:pPr>
+              <a:buFont typeface="Wingdings" pitchFamily="2" charset="2"/>
+              <a:buChar char="v"/>
+            </a:pPr>
+            <a:endParaRPr lang="en-US" dirty="0"/>
+          </a:p>
+          <a:p>
+            <a:pPr>
+              <a:buFont typeface="Wingdings" pitchFamily="2" charset="2"/>
+              <a:buChar char="v"/>
+            </a:pPr>
+            <a:endParaRPr lang="en-GB" sz="1800" dirty="0"/>
+          </a:p>
+        </p:txBody>
+      </p:sp>
+      <p:sp>
+        <p:nvSpPr>
+          <p:cNvPr id="5" name="Title 4">
+            <a:extLst>
+              <a:ext uri="{FF2B5EF4-FFF2-40B4-BE49-F238E27FC236}">
+                <a16:creationId xmlns:a16="http://schemas.microsoft.com/office/drawing/2014/main" id="{5140A450-4D07-2036-675B-CD928BDFEEB7}"/>
+              </a:ext>
+            </a:extLst>
+          </p:cNvPr>
+          <p:cNvSpPr>
+            <a:spLocks noGrp="1"/>
+          </p:cNvSpPr>
+          <p:nvPr>
+            <p:ph type="title"/>
+          </p:nvPr>
+        </p:nvSpPr>
+        <p:spPr>
+          <a:xfrm>
+            <a:off x="467999" y="528034"/>
+            <a:ext cx="11257200" cy="515576"/>
+          </a:xfrm>
+        </p:spPr>
+        <p:txBody>
+          <a:bodyPr>
+            <a:normAutofit fontScale="90000"/>
+          </a:bodyPr>
+          <a:lstStyle/>
+          <a:p>
+            <a:r>
+              <a:rPr lang="en-US" sz="3000" dirty="0"/>
+              <a:t>Execute Upgrade</a:t>
+            </a:r>
+            <a:endParaRPr lang="en-GB" sz="3000" dirty="0"/>
+          </a:p>
+        </p:txBody>
+      </p:sp>
+      <p:sp>
+        <p:nvSpPr>
+          <p:cNvPr id="4" name="TextBox 3">
+            <a:extLst>
+              <a:ext uri="{FF2B5EF4-FFF2-40B4-BE49-F238E27FC236}">
+                <a16:creationId xmlns:a16="http://schemas.microsoft.com/office/drawing/2014/main" id="{A9FFBC68-089A-8885-3CB6-1599AB86837D}"/>
+              </a:ext>
+            </a:extLst>
+          </p:cNvPr>
+          <p:cNvSpPr txBox="1"/>
+          <p:nvPr/>
+        </p:nvSpPr>
+        <p:spPr>
+          <a:xfrm>
+            <a:off x="7725508" y="2649415"/>
+            <a:ext cx="65" cy="184666"/>
+          </a:xfrm>
+          <a:prstGeom prst="rect">
+            <a:avLst/>
+          </a:prstGeom>
+          <a:noFill/>
+        </p:spPr>
+        <p:txBody>
+          <a:bodyPr wrap="none" lIns="0" tIns="0" rIns="0" bIns="0" numCol="1" spcCol="151200" rtlCol="0">
+            <a:spAutoFit/>
+          </a:bodyPr>
+          <a:lstStyle/>
+          <a:p>
+            <a:endParaRPr lang="en-US" sz="1200" dirty="0"/>
+          </a:p>
+        </p:txBody>
+      </p:sp>
+      <p:sp>
+        <p:nvSpPr>
+          <p:cNvPr id="6" name="TextBox 5">
+            <a:extLst>
+              <a:ext uri="{FF2B5EF4-FFF2-40B4-BE49-F238E27FC236}">
+                <a16:creationId xmlns:a16="http://schemas.microsoft.com/office/drawing/2014/main" id="{2DAB6BF1-F1BE-CEA1-7FD5-DEC5C7A8E828}"/>
+              </a:ext>
+            </a:extLst>
+          </p:cNvPr>
+          <p:cNvSpPr txBox="1"/>
+          <p:nvPr/>
+        </p:nvSpPr>
+        <p:spPr>
+          <a:xfrm>
+            <a:off x="834065" y="3899112"/>
+            <a:ext cx="8593472" cy="1077218"/>
+          </a:xfrm>
+          <a:prstGeom prst="rect">
+            <a:avLst/>
+          </a:prstGeom>
+          <a:noFill/>
+        </p:spPr>
+        <p:txBody>
+          <a:bodyPr wrap="square" rtlCol="0">
+            <a:spAutoFit/>
+          </a:bodyPr>
+          <a:lstStyle/>
+          <a:p>
+            <a:r>
+              <a:rPr lang="en-US" sz="1600" dirty="0">
+                <a:latin typeface=""/>
+              </a:rPr>
+              <a:t>Upgrade the application from Java 17 to Java 21 using the instructions in docs/ai-tasks/instructions/java-17-to-21-upgrade-instructions.md.</a:t>
+            </a:r>
+          </a:p>
+          <a:p>
+            <a:r>
+              <a:rPr lang="en-US" sz="1600" dirty="0">
+                <a:latin typeface=""/>
+              </a:rPr>
+              <a:t>If you cannot access this file, stop and ask me to provide its contents.</a:t>
+            </a:r>
+          </a:p>
+          <a:p>
+            <a:r>
+              <a:rPr lang="en-US" sz="1600" dirty="0">
+                <a:latin typeface=""/>
+              </a:rPr>
+              <a:t>Do not infer or invent upgrade steps.</a:t>
+            </a:r>
+          </a:p>
+        </p:txBody>
+      </p:sp>
+      <p:sp>
+        <p:nvSpPr>
+          <p:cNvPr id="7" name="Slide Number Placeholder 6">
+            <a:extLst>
+              <a:ext uri="{FF2B5EF4-FFF2-40B4-BE49-F238E27FC236}">
+                <a16:creationId xmlns:a16="http://schemas.microsoft.com/office/drawing/2014/main" id="{282B625D-613B-7420-BD12-EAEACAE1A9F1}"/>
+              </a:ext>
+            </a:extLst>
+          </p:cNvPr>
+          <p:cNvSpPr>
+            <a:spLocks noGrp="1"/>
+          </p:cNvSpPr>
+          <p:nvPr>
+            <p:ph type="sldNum" sz="quarter" idx="12"/>
+          </p:nvPr>
+        </p:nvSpPr>
+        <p:spPr/>
+        <p:txBody>
+          <a:bodyPr/>
+          <a:lstStyle/>
+          <a:p>
+            <a:fld id="{D57F1E4F-1CFF-5643-939E-217C01CDF565}" type="slidenum">
+              <a:rPr lang="en-US" smtClean="0"/>
+              <a:pPr/>
+              <a:t>18</a:t>
+            </a:fld>
+            <a:endParaRPr lang="en-US" dirty="0"/>
+          </a:p>
+        </p:txBody>
+      </p:sp>
+    </p:spTree>
+    <p:extLst>
+      <p:ext uri="{BB962C8B-B14F-4D97-AF65-F5344CB8AC3E}">
+        <p14:creationId xmlns:p14="http://schemas.microsoft.com/office/powerpoint/2010/main" val="1628521237"/>
+      </p:ext>
+    </p:extLst>
+  </p:cSld>
+  <p:clrMapOvr>
+    <a:masterClrMapping/>
+  </p:clrMapOvr>
+</p:sld>
+</file>
+
+<file path=ppt/slides/slide19.xml><?xml version="1.0" encoding="utf-8"?>
 <p:sld xmlns:a="http://schemas.openxmlformats.org/drawingml/2006/main" xmlns:r="http://schemas.openxmlformats.org/officeDocument/2006/relationships" xmlns:p="http://schemas.openxmlformats.org/presentationml/2006/main">
   <p:cSld>
     <p:spTree>
@@ -11902,62 +12592,9 @@
               <a:buChar char="v"/>
             </a:pPr>
             <a:r>
-              <a:rPr lang="en-US" b="1" dirty="0">
-                <a:solidFill>
-                  <a:schemeClr val="accent2">
-                    <a:lumMod val="75000"/>
-                  </a:schemeClr>
-                </a:solidFill>
-              </a:rPr>
-              <a:t>Logs are equally important in AI, similar to any good application</a:t>
-            </a:r>
-          </a:p>
-          <a:p>
-            <a:pPr>
-              <a:buFont typeface="Wingdings" pitchFamily="2" charset="2"/>
-              <a:buChar char="v"/>
-            </a:pPr>
-            <a:r>
               <a:rPr lang="en-US" dirty="0"/>
-              <a:t>Unlike normal applications, log entries may not come</a:t>
-            </a:r>
-          </a:p>
-          <a:p>
-            <a:pPr lvl="1">
-              <a:buFont typeface="Wingdings" pitchFamily="2" charset="2"/>
-              <a:buChar char="v"/>
-            </a:pPr>
-            <a:r>
-              <a:rPr lang="en-US" dirty="0"/>
-              <a:t>Models skip the logging</a:t>
-            </a:r>
-          </a:p>
-          <a:p>
-            <a:pPr lvl="1">
-              <a:buFont typeface="Wingdings" pitchFamily="2" charset="2"/>
-              <a:buChar char="v"/>
-            </a:pPr>
-            <a:r>
-              <a:rPr lang="en-US" dirty="0"/>
-              <a:t>Instructions are in natural language – log the time taken to execute each step</a:t>
-            </a:r>
-          </a:p>
-          <a:p>
-            <a:pPr>
-              <a:buFont typeface="Wingdings" pitchFamily="2" charset="2"/>
-              <a:buChar char="v"/>
-            </a:pPr>
-            <a:r>
-              <a:rPr lang="en-US" dirty="0"/>
-              <a:t>Log decisions and reasoning in each step</a:t>
-            </a:r>
-          </a:p>
-          <a:p>
-            <a:pPr>
-              <a:buFont typeface="Wingdings" pitchFamily="2" charset="2"/>
-              <a:buChar char="v"/>
-            </a:pPr>
-            <a:endParaRPr lang="en-US" dirty="0"/>
+              <a:t>Demo</a:t>
+            </a:r>
           </a:p>
           <a:p>
             <a:pPr>
@@ -12018,8 +12655,8 @@
           <a:lstStyle/>
           <a:p>
             <a:r>
-              <a:rPr lang="en-US" sz="3000" dirty="0"/>
-              <a:t>Upgrade Logs</a:t>
+              <a:rPr lang="en-US" sz="3200" dirty="0"/>
+              <a:t>Demo: Java Upgrade in Action</a:t>
             </a:r>
             <a:endParaRPr lang="en-GB" sz="3000" dirty="0"/>
           </a:p>
@@ -12081,7 +12718,7 @@
             <a:fld id="{D57F1E4F-1CFF-5643-939E-217C01CDF565}" type="slidenum">
               <a:rPr lang="en-US" smtClean="0"/>
               <a:pPr/>
-              <a:t>18</a:t>
+              <a:t>19</a:t>
             </a:fld>
             <a:endParaRPr lang="en-US" dirty="0"/>
           </a:p>
@@ -12091,346 +12728,6 @@
     <p:extLst>
       <p:ext uri="{BB962C8B-B14F-4D97-AF65-F5344CB8AC3E}">
         <p14:creationId xmlns:p14="http://schemas.microsoft.com/office/powerpoint/2010/main" val="914864149"/>
-      </p:ext>
-    </p:extLst>
-  </p:cSld>
-  <p:clrMapOvr>
-    <a:masterClrMapping/>
-  </p:clrMapOvr>
-</p:sld>
-</file>
-
-<file path=ppt/slides/slide19.xml><?xml version="1.0" encoding="utf-8"?>
-<p:sld xmlns:a="http://schemas.openxmlformats.org/drawingml/2006/main" xmlns:r="http://schemas.openxmlformats.org/officeDocument/2006/relationships" xmlns:p="http://schemas.openxmlformats.org/presentationml/2006/main">
-  <p:cSld>
-    <p:spTree>
-      <p:nvGrpSpPr>
-        <p:cNvPr id="1" name="">
-          <a:extLst>
-            <a:ext uri="{FF2B5EF4-FFF2-40B4-BE49-F238E27FC236}">
-              <a16:creationId xmlns:a16="http://schemas.microsoft.com/office/drawing/2014/main" id="{1923DE13-732F-71B3-4ED8-3D1287AB2D29}"/>
-            </a:ext>
-          </a:extLst>
-        </p:cNvPr>
-        <p:cNvGrpSpPr/>
-        <p:nvPr/>
-      </p:nvGrpSpPr>
-      <p:grpSpPr>
-        <a:xfrm>
-          <a:off x="0" y="0"/>
-          <a:ext cx="0" cy="0"/>
-          <a:chOff x="0" y="0"/>
-          <a:chExt cx="0" cy="0"/>
-        </a:xfrm>
-      </p:grpSpPr>
-      <p:sp>
-        <p:nvSpPr>
-          <p:cNvPr id="8" name="Content Placeholder 7">
-            <a:extLst>
-              <a:ext uri="{FF2B5EF4-FFF2-40B4-BE49-F238E27FC236}">
-                <a16:creationId xmlns:a16="http://schemas.microsoft.com/office/drawing/2014/main" id="{18E8C7AC-D174-F563-E707-249EA075DFDC}"/>
-              </a:ext>
-            </a:extLst>
-          </p:cNvPr>
-          <p:cNvSpPr>
-            <a:spLocks noGrp="1"/>
-          </p:cNvSpPr>
-          <p:nvPr>
-            <p:ph idx="1"/>
-          </p:nvPr>
-        </p:nvSpPr>
-        <p:spPr>
-          <a:xfrm>
-            <a:off x="467999" y="1043611"/>
-            <a:ext cx="10644501" cy="5362876"/>
-          </a:xfrm>
-        </p:spPr>
-        <p:txBody>
-          <a:bodyPr>
-            <a:normAutofit/>
-          </a:bodyPr>
-          <a:lstStyle/>
-          <a:p>
-            <a:pPr>
-              <a:buFont typeface="Wingdings" pitchFamily="2" charset="2"/>
-              <a:buChar char="v"/>
-            </a:pPr>
-            <a:r>
-              <a:rPr lang="en-US" dirty="0"/>
-              <a:t>Copy the AI Instructions from </a:t>
-            </a:r>
-            <a:r>
-              <a:rPr lang="en-US" dirty="0" err="1"/>
-              <a:t>Github</a:t>
-            </a:r>
-            <a:r>
-              <a:rPr lang="en-US" dirty="0"/>
-              <a:t> to the to be upgraded Git repo</a:t>
-            </a:r>
-          </a:p>
-          <a:p>
-            <a:pPr lvl="1">
-              <a:buFont typeface="Wingdings" pitchFamily="2" charset="2"/>
-              <a:buChar char="v"/>
-            </a:pPr>
-            <a:r>
-              <a:rPr lang="en-US" dirty="0"/>
-              <a:t>URL Java 17 to 21: </a:t>
-            </a:r>
-            <a:r>
-              <a:rPr lang="en-US" dirty="0">
-                <a:hlinkClick r:id="rId3"/>
-              </a:rPr>
-              <a:t>https://github.com/sri-chalam/ai-tech-notes/blob/main/articles/ai-assisted-java-upgrade/java-17-to-21/instructions/java-17-to-21-upgrade-instructions.md</a:t>
-            </a:r>
-            <a:endParaRPr lang="en-US" dirty="0"/>
-          </a:p>
-          <a:p>
-            <a:pPr lvl="1">
-              <a:buFont typeface="Wingdings" pitchFamily="2" charset="2"/>
-              <a:buChar char="v"/>
-            </a:pPr>
-            <a:r>
-              <a:rPr lang="en-US" dirty="0"/>
-              <a:t>URL Java 21 to 25: </a:t>
-            </a:r>
-            <a:r>
-              <a:rPr lang="en-US" dirty="0">
-                <a:hlinkClick r:id="rId4"/>
-              </a:rPr>
-              <a:t>https://github.com/sri-chalam/ai-tech-notes/blob/main/articles/ai-assisted-java-upgrade/java-21-to-25/instructions/java-21-to-25-upgrade-instructions.md</a:t>
-            </a:r>
-            <a:endParaRPr lang="en-US" dirty="0"/>
-          </a:p>
-          <a:p>
-            <a:pPr lvl="1">
-              <a:buFont typeface="Wingdings" pitchFamily="2" charset="2"/>
-              <a:buChar char="v"/>
-            </a:pPr>
-            <a:r>
-              <a:rPr lang="en-US" dirty="0"/>
-              <a:t>Suggested directory to copy in laptop:</a:t>
-            </a:r>
-          </a:p>
-          <a:p>
-            <a:pPr lvl="2">
-              <a:buFont typeface="Wingdings" pitchFamily="2" charset="2"/>
-              <a:buChar char="v"/>
-            </a:pPr>
-            <a:r>
-              <a:rPr lang="en-US" dirty="0"/>
-              <a:t>&lt;Git repo root&gt;/docs/ai-tasks/instructions/</a:t>
-            </a:r>
-          </a:p>
-          <a:p>
-            <a:pPr>
-              <a:buFont typeface="Wingdings" pitchFamily="2" charset="2"/>
-              <a:buChar char="v"/>
-            </a:pPr>
-            <a:r>
-              <a:rPr lang="en-US" dirty="0"/>
-              <a:t>LLM prompt to kick off the upgrade</a:t>
-            </a:r>
-          </a:p>
-          <a:p>
-            <a:pPr>
-              <a:buFont typeface="Wingdings" pitchFamily="2" charset="2"/>
-              <a:buChar char="v"/>
-            </a:pPr>
-            <a:endParaRPr lang="en-US" dirty="0"/>
-          </a:p>
-          <a:p>
-            <a:pPr>
-              <a:buFont typeface="Wingdings" pitchFamily="2" charset="2"/>
-              <a:buChar char="v"/>
-            </a:pPr>
-            <a:endParaRPr lang="en-US" dirty="0"/>
-          </a:p>
-          <a:p>
-            <a:pPr>
-              <a:buFont typeface="Wingdings" pitchFamily="2" charset="2"/>
-              <a:buChar char="v"/>
-            </a:pPr>
-            <a:endParaRPr lang="en-US" dirty="0"/>
-          </a:p>
-          <a:p>
-            <a:pPr>
-              <a:buFont typeface="Wingdings" pitchFamily="2" charset="2"/>
-              <a:buChar char="v"/>
-            </a:pPr>
-            <a:endParaRPr lang="en-US" dirty="0"/>
-          </a:p>
-          <a:p>
-            <a:pPr>
-              <a:buFont typeface="Wingdings" pitchFamily="2" charset="2"/>
-              <a:buChar char="v"/>
-            </a:pPr>
-            <a:endParaRPr lang="en-US" dirty="0"/>
-          </a:p>
-          <a:p>
-            <a:pPr>
-              <a:buFont typeface="Wingdings" pitchFamily="2" charset="2"/>
-              <a:buChar char="v"/>
-            </a:pPr>
-            <a:endParaRPr lang="en-GB" sz="1800" dirty="0"/>
-          </a:p>
-        </p:txBody>
-      </p:sp>
-      <p:sp>
-        <p:nvSpPr>
-          <p:cNvPr id="5" name="Title 4">
-            <a:extLst>
-              <a:ext uri="{FF2B5EF4-FFF2-40B4-BE49-F238E27FC236}">
-                <a16:creationId xmlns:a16="http://schemas.microsoft.com/office/drawing/2014/main" id="{5140A450-4D07-2036-675B-CD928BDFEEB7}"/>
-              </a:ext>
-            </a:extLst>
-          </p:cNvPr>
-          <p:cNvSpPr>
-            <a:spLocks noGrp="1"/>
-          </p:cNvSpPr>
-          <p:nvPr>
-            <p:ph type="title"/>
-          </p:nvPr>
-        </p:nvSpPr>
-        <p:spPr>
-          <a:xfrm>
-            <a:off x="467999" y="528034"/>
-            <a:ext cx="11257200" cy="515576"/>
-          </a:xfrm>
-        </p:spPr>
-        <p:txBody>
-          <a:bodyPr>
-            <a:normAutofit fontScale="90000"/>
-          </a:bodyPr>
-          <a:lstStyle/>
-          <a:p>
-            <a:r>
-              <a:rPr lang="en-US" sz="3000" dirty="0"/>
-              <a:t>Execute Upgrade</a:t>
-            </a:r>
-            <a:endParaRPr lang="en-GB" sz="3000" dirty="0"/>
-          </a:p>
-        </p:txBody>
-      </p:sp>
-      <p:sp>
-        <p:nvSpPr>
-          <p:cNvPr id="4" name="TextBox 3">
-            <a:extLst>
-              <a:ext uri="{FF2B5EF4-FFF2-40B4-BE49-F238E27FC236}">
-                <a16:creationId xmlns:a16="http://schemas.microsoft.com/office/drawing/2014/main" id="{A9FFBC68-089A-8885-3CB6-1599AB86837D}"/>
-              </a:ext>
-            </a:extLst>
-          </p:cNvPr>
-          <p:cNvSpPr txBox="1"/>
-          <p:nvPr/>
-        </p:nvSpPr>
-        <p:spPr>
-          <a:xfrm>
-            <a:off x="7725508" y="2649415"/>
-            <a:ext cx="65" cy="184666"/>
-          </a:xfrm>
-          <a:prstGeom prst="rect">
-            <a:avLst/>
-          </a:prstGeom>
-          <a:noFill/>
-        </p:spPr>
-        <p:txBody>
-          <a:bodyPr wrap="none" lIns="0" tIns="0" rIns="0" bIns="0" numCol="1" spcCol="151200" rtlCol="0">
-            <a:spAutoFit/>
-          </a:bodyPr>
-          <a:lstStyle/>
-          <a:p>
-            <a:endParaRPr lang="en-US" sz="1200" dirty="0"/>
-          </a:p>
-        </p:txBody>
-      </p:sp>
-      <p:sp>
-        <p:nvSpPr>
-          <p:cNvPr id="6" name="TextBox 5">
-            <a:extLst>
-              <a:ext uri="{FF2B5EF4-FFF2-40B4-BE49-F238E27FC236}">
-                <a16:creationId xmlns:a16="http://schemas.microsoft.com/office/drawing/2014/main" id="{2DAB6BF1-F1BE-CEA1-7FD5-DEC5C7A8E828}"/>
-              </a:ext>
-            </a:extLst>
-          </p:cNvPr>
-          <p:cNvSpPr txBox="1"/>
-          <p:nvPr/>
-        </p:nvSpPr>
-        <p:spPr>
-          <a:xfrm>
-            <a:off x="834065" y="3899112"/>
-            <a:ext cx="8593472" cy="1077218"/>
-          </a:xfrm>
-          <a:prstGeom prst="rect">
-            <a:avLst/>
-          </a:prstGeom>
-          <a:noFill/>
-        </p:spPr>
-        <p:txBody>
-          <a:bodyPr wrap="square" rtlCol="0">
-            <a:spAutoFit/>
-          </a:bodyPr>
-          <a:lstStyle/>
-          <a:p>
-            <a:r>
-              <a:rPr lang="en-US" sz="1600" dirty="0">
-                <a:latin typeface=""/>
-              </a:rPr>
-              <a:t>Upgrade the application from Java 17 to Java 21 using the instructions in docs/ai-tasks/instructions/java-17-to-21-upgrade-instructions.md.</a:t>
-            </a:r>
-          </a:p>
-          <a:p>
-            <a:r>
-              <a:rPr lang="en-US" sz="1600" dirty="0">
-                <a:latin typeface=""/>
-              </a:rPr>
-              <a:t>If you cannot access this file, stop and ask me to provide its contents.</a:t>
-            </a:r>
-          </a:p>
-          <a:p>
-            <a:r>
-              <a:rPr lang="en-US" sz="1600" dirty="0">
-                <a:latin typeface=""/>
-              </a:rPr>
-              <a:t>Do not infer or invent upgrade steps.</a:t>
-            </a:r>
-          </a:p>
-        </p:txBody>
-      </p:sp>
-      <p:sp>
-        <p:nvSpPr>
-          <p:cNvPr id="7" name="Slide Number Placeholder 6">
-            <a:extLst>
-              <a:ext uri="{FF2B5EF4-FFF2-40B4-BE49-F238E27FC236}">
-                <a16:creationId xmlns:a16="http://schemas.microsoft.com/office/drawing/2014/main" id="{282B625D-613B-7420-BD12-EAEACAE1A9F1}"/>
-              </a:ext>
-            </a:extLst>
-          </p:cNvPr>
-          <p:cNvSpPr>
-            <a:spLocks noGrp="1"/>
-          </p:cNvSpPr>
-          <p:nvPr>
-            <p:ph type="sldNum" sz="quarter" idx="12"/>
-          </p:nvPr>
-        </p:nvSpPr>
-        <p:spPr/>
-        <p:txBody>
-          <a:bodyPr/>
-          <a:lstStyle/>
-          <a:p>
-            <a:fld id="{D57F1E4F-1CFF-5643-939E-217C01CDF565}" type="slidenum">
-              <a:rPr lang="en-US" smtClean="0"/>
-              <a:pPr/>
-              <a:t>19</a:t>
-            </a:fld>
-            <a:endParaRPr lang="en-US" dirty="0"/>
-          </a:p>
-        </p:txBody>
-      </p:sp>
-    </p:spTree>
-    <p:extLst>
-      <p:ext uri="{BB962C8B-B14F-4D97-AF65-F5344CB8AC3E}">
-        <p14:creationId xmlns:p14="http://schemas.microsoft.com/office/powerpoint/2010/main" val="1628521237"/>
       </p:ext>
     </p:extLst>
   </p:cSld>
@@ -12507,7 +12804,7 @@
             </a:pPr>
             <a:r>
               <a:rPr lang="en-US" sz="2000" dirty="0"/>
-              <a:t>Approach 1: </a:t>
+              <a:t>Java Upgrade Approach 1: </a:t>
             </a:r>
             <a:r>
               <a:rPr lang="en-US" sz="2000" dirty="0" err="1"/>
@@ -12525,7 +12822,7 @@
             </a:pPr>
             <a:r>
               <a:rPr lang="en-US" sz="2000" dirty="0"/>
-              <a:t>Approach 2: AI Agents</a:t>
+              <a:t>Java Upgrade Approach 2: AI Agents</a:t>
             </a:r>
             <a:endParaRPr lang="en-GB" sz="2000" dirty="0"/>
           </a:p>
@@ -12556,7 +12853,17 @@
             </a:pPr>
             <a:r>
               <a:rPr lang="en-US" sz="2000" dirty="0"/>
-              <a:t>Steps in the Java Upgrade </a:t>
+              <a:t>Steps in the Java Upgrade</a:t>
+            </a:r>
+          </a:p>
+          <a:p>
+            <a:pPr>
+              <a:buFont typeface="Wingdings" pitchFamily="2" charset="2"/>
+              <a:buChar char="v"/>
+            </a:pPr>
+            <a:r>
+              <a:rPr lang="en-US" sz="2000" dirty="0"/>
+              <a:t>Demo – Java Upgrade in Action</a:t>
             </a:r>
             <a:endParaRPr lang="en-GB" sz="2000" dirty="0"/>
           </a:p>
@@ -12712,6 +13019,260 @@
 </file>
 
 <file path=ppt/slides/slide20.xml><?xml version="1.0" encoding="utf-8"?>
+<p:sld xmlns:a="http://schemas.openxmlformats.org/drawingml/2006/main" xmlns:r="http://schemas.openxmlformats.org/officeDocument/2006/relationships" xmlns:p="http://schemas.openxmlformats.org/presentationml/2006/main">
+  <p:cSld>
+    <p:spTree>
+      <p:nvGrpSpPr>
+        <p:cNvPr id="1" name="">
+          <a:extLst>
+            <a:ext uri="{FF2B5EF4-FFF2-40B4-BE49-F238E27FC236}">
+              <a16:creationId xmlns:a16="http://schemas.microsoft.com/office/drawing/2014/main" id="{02929A5F-C0BA-ADBC-6EED-CC69AE12BE64}"/>
+            </a:ext>
+          </a:extLst>
+        </p:cNvPr>
+        <p:cNvGrpSpPr/>
+        <p:nvPr/>
+      </p:nvGrpSpPr>
+      <p:grpSpPr>
+        <a:xfrm>
+          <a:off x="0" y="0"/>
+          <a:ext cx="0" cy="0"/>
+          <a:chOff x="0" y="0"/>
+          <a:chExt cx="0" cy="0"/>
+        </a:xfrm>
+      </p:grpSpPr>
+      <p:sp>
+        <p:nvSpPr>
+          <p:cNvPr id="8" name="Content Placeholder 7">
+            <a:extLst>
+              <a:ext uri="{FF2B5EF4-FFF2-40B4-BE49-F238E27FC236}">
+                <a16:creationId xmlns:a16="http://schemas.microsoft.com/office/drawing/2014/main" id="{6B513EA1-B4BE-341E-1EA4-C9DED2BF54FC}"/>
+              </a:ext>
+            </a:extLst>
+          </p:cNvPr>
+          <p:cNvSpPr>
+            <a:spLocks noGrp="1"/>
+          </p:cNvSpPr>
+          <p:nvPr>
+            <p:ph idx="1"/>
+          </p:nvPr>
+        </p:nvSpPr>
+        <p:spPr>
+          <a:xfrm>
+            <a:off x="467999" y="1043611"/>
+            <a:ext cx="10644501" cy="5362876"/>
+          </a:xfrm>
+        </p:spPr>
+        <p:txBody>
+          <a:bodyPr>
+            <a:normAutofit/>
+          </a:bodyPr>
+          <a:lstStyle/>
+          <a:p>
+            <a:pPr>
+              <a:buFont typeface="Wingdings" pitchFamily="2" charset="2"/>
+              <a:buChar char="v"/>
+            </a:pPr>
+            <a:r>
+              <a:rPr lang="en-US" b="1" dirty="0">
+                <a:solidFill>
+                  <a:schemeClr val="accent2">
+                    <a:lumMod val="75000"/>
+                  </a:schemeClr>
+                </a:solidFill>
+              </a:rPr>
+              <a:t>Logs are equally important in AI, similar to any good application</a:t>
+            </a:r>
+          </a:p>
+          <a:p>
+            <a:pPr>
+              <a:buFont typeface="Wingdings" pitchFamily="2" charset="2"/>
+              <a:buChar char="v"/>
+            </a:pPr>
+            <a:r>
+              <a:rPr lang="en-US" dirty="0"/>
+              <a:t>Unlike normal applications, log entries may not come</a:t>
+            </a:r>
+          </a:p>
+          <a:p>
+            <a:pPr lvl="1">
+              <a:buFont typeface="Wingdings" pitchFamily="2" charset="2"/>
+              <a:buChar char="v"/>
+            </a:pPr>
+            <a:r>
+              <a:rPr lang="en-US" dirty="0"/>
+              <a:t>Models skip the logging</a:t>
+            </a:r>
+          </a:p>
+          <a:p>
+            <a:pPr lvl="1">
+              <a:buFont typeface="Wingdings" pitchFamily="2" charset="2"/>
+              <a:buChar char="v"/>
+            </a:pPr>
+            <a:r>
+              <a:rPr lang="en-US" dirty="0"/>
+              <a:t>Instructions are in natural language – log the time taken to execute each step</a:t>
+            </a:r>
+          </a:p>
+          <a:p>
+            <a:pPr>
+              <a:buFont typeface="Wingdings" pitchFamily="2" charset="2"/>
+              <a:buChar char="v"/>
+            </a:pPr>
+            <a:r>
+              <a:rPr lang="en-US" dirty="0"/>
+              <a:t>Log decisions and reasoning in each step</a:t>
+            </a:r>
+          </a:p>
+          <a:p>
+            <a:pPr>
+              <a:buFont typeface="Wingdings" pitchFamily="2" charset="2"/>
+              <a:buChar char="v"/>
+            </a:pPr>
+            <a:endParaRPr lang="en-US" dirty="0"/>
+          </a:p>
+          <a:p>
+            <a:pPr>
+              <a:buFont typeface="Wingdings" pitchFamily="2" charset="2"/>
+              <a:buChar char="v"/>
+            </a:pPr>
+            <a:endParaRPr lang="en-US" dirty="0"/>
+          </a:p>
+          <a:p>
+            <a:pPr>
+              <a:buFont typeface="Wingdings" pitchFamily="2" charset="2"/>
+              <a:buChar char="v"/>
+            </a:pPr>
+            <a:endParaRPr lang="en-US" dirty="0"/>
+          </a:p>
+          <a:p>
+            <a:pPr>
+              <a:buFont typeface="Wingdings" pitchFamily="2" charset="2"/>
+              <a:buChar char="v"/>
+            </a:pPr>
+            <a:endParaRPr lang="en-US" dirty="0"/>
+          </a:p>
+          <a:p>
+            <a:pPr>
+              <a:buFont typeface="Wingdings" pitchFamily="2" charset="2"/>
+              <a:buChar char="v"/>
+            </a:pPr>
+            <a:endParaRPr lang="en-GB" sz="1800" dirty="0"/>
+          </a:p>
+        </p:txBody>
+      </p:sp>
+      <p:sp>
+        <p:nvSpPr>
+          <p:cNvPr id="5" name="Title 4">
+            <a:extLst>
+              <a:ext uri="{FF2B5EF4-FFF2-40B4-BE49-F238E27FC236}">
+                <a16:creationId xmlns:a16="http://schemas.microsoft.com/office/drawing/2014/main" id="{2F354087-C49B-85B3-A830-1F738BFE768E}"/>
+              </a:ext>
+            </a:extLst>
+          </p:cNvPr>
+          <p:cNvSpPr>
+            <a:spLocks noGrp="1"/>
+          </p:cNvSpPr>
+          <p:nvPr>
+            <p:ph type="title"/>
+          </p:nvPr>
+        </p:nvSpPr>
+        <p:spPr>
+          <a:xfrm>
+            <a:off x="467999" y="528034"/>
+            <a:ext cx="11257200" cy="515576"/>
+          </a:xfrm>
+        </p:spPr>
+        <p:txBody>
+          <a:bodyPr>
+            <a:normAutofit fontScale="90000"/>
+          </a:bodyPr>
+          <a:lstStyle/>
+          <a:p>
+            <a:r>
+              <a:rPr lang="en-US" sz="3000" dirty="0"/>
+              <a:t>Upgrade Logs</a:t>
+            </a:r>
+            <a:endParaRPr lang="en-GB" sz="3000" dirty="0"/>
+          </a:p>
+        </p:txBody>
+      </p:sp>
+      <p:sp>
+        <p:nvSpPr>
+          <p:cNvPr id="4" name="TextBox 3">
+            <a:extLst>
+              <a:ext uri="{FF2B5EF4-FFF2-40B4-BE49-F238E27FC236}">
+                <a16:creationId xmlns:a16="http://schemas.microsoft.com/office/drawing/2014/main" id="{126AD08D-E89A-99E2-2D0D-A5FA24ED3DAC}"/>
+              </a:ext>
+            </a:extLst>
+          </p:cNvPr>
+          <p:cNvSpPr txBox="1"/>
+          <p:nvPr/>
+        </p:nvSpPr>
+        <p:spPr>
+          <a:xfrm>
+            <a:off x="7725508" y="2649415"/>
+            <a:ext cx="65" cy="184666"/>
+          </a:xfrm>
+          <a:prstGeom prst="rect">
+            <a:avLst/>
+          </a:prstGeom>
+          <a:noFill/>
+        </p:spPr>
+        <p:txBody>
+          <a:bodyPr wrap="none" lIns="0" tIns="0" rIns="0" bIns="0" numCol="1" spcCol="151200" rtlCol="0">
+            <a:spAutoFit/>
+          </a:bodyPr>
+          <a:lstStyle/>
+          <a:p>
+            <a:endParaRPr lang="en-US" sz="1200" dirty="0"/>
+          </a:p>
+        </p:txBody>
+      </p:sp>
+      <p:sp>
+        <p:nvSpPr>
+          <p:cNvPr id="6" name="Slide Number Placeholder 5">
+            <a:extLst>
+              <a:ext uri="{FF2B5EF4-FFF2-40B4-BE49-F238E27FC236}">
+                <a16:creationId xmlns:a16="http://schemas.microsoft.com/office/drawing/2014/main" id="{47AF1E5A-1F75-78D7-0230-E7221912869D}"/>
+              </a:ext>
+            </a:extLst>
+          </p:cNvPr>
+          <p:cNvSpPr>
+            <a:spLocks noGrp="1"/>
+          </p:cNvSpPr>
+          <p:nvPr>
+            <p:ph type="sldNum" sz="quarter" idx="12"/>
+          </p:nvPr>
+        </p:nvSpPr>
+        <p:spPr/>
+        <p:txBody>
+          <a:bodyPr/>
+          <a:lstStyle/>
+          <a:p>
+            <a:fld id="{D57F1E4F-1CFF-5643-939E-217C01CDF565}" type="slidenum">
+              <a:rPr lang="en-US" smtClean="0"/>
+              <a:pPr/>
+              <a:t>20</a:t>
+            </a:fld>
+            <a:endParaRPr lang="en-US" dirty="0"/>
+          </a:p>
+        </p:txBody>
+      </p:sp>
+    </p:spTree>
+    <p:extLst>
+      <p:ext uri="{BB962C8B-B14F-4D97-AF65-F5344CB8AC3E}">
+        <p14:creationId xmlns:p14="http://schemas.microsoft.com/office/powerpoint/2010/main" val="2606862636"/>
+      </p:ext>
+    </p:extLst>
+  </p:cSld>
+  <p:clrMapOvr>
+    <a:masterClrMapping/>
+  </p:clrMapOvr>
+</p:sld>
+</file>
+
+<file path=ppt/slides/slide21.xml><?xml version="1.0" encoding="utf-8"?>
 <p:sld xmlns:a="http://schemas.openxmlformats.org/drawingml/2006/main" xmlns:r="http://schemas.openxmlformats.org/officeDocument/2006/relationships" xmlns:p="http://schemas.openxmlformats.org/presentationml/2006/main">
   <p:cSld>
     <p:spTree>
@@ -12966,7 +13527,7 @@
             <a:fld id="{D57F1E4F-1CFF-5643-939E-217C01CDF565}" type="slidenum">
               <a:rPr lang="en-US" smtClean="0"/>
               <a:pPr/>
-              <a:t>20</a:t>
+              <a:t>21</a:t>
             </a:fld>
             <a:endParaRPr lang="en-US" dirty="0"/>
           </a:p>
@@ -12985,7 +13546,7 @@
 </p:sld>
 </file>
 
-<file path=ppt/slides/slide21.xml><?xml version="1.0" encoding="utf-8"?>
+<file path=ppt/slides/slide22.xml><?xml version="1.0" encoding="utf-8"?>
 <p:sld xmlns:a="http://schemas.openxmlformats.org/drawingml/2006/main" xmlns:r="http://schemas.openxmlformats.org/officeDocument/2006/relationships" xmlns:p="http://schemas.openxmlformats.org/presentationml/2006/main">
   <p:cSld>
     <p:spTree>
@@ -13270,7 +13831,7 @@
             <a:fld id="{D57F1E4F-1CFF-5643-939E-217C01CDF565}" type="slidenum">
               <a:rPr lang="en-US" smtClean="0"/>
               <a:pPr/>
-              <a:t>21</a:t>
+              <a:t>22</a:t>
             </a:fld>
             <a:endParaRPr lang="en-US" dirty="0"/>
           </a:p>
@@ -13289,7 +13850,7 @@
 </p:sld>
 </file>
 
-<file path=ppt/slides/slide22.xml><?xml version="1.0" encoding="utf-8"?>
+<file path=ppt/slides/slide23.xml><?xml version="1.0" encoding="utf-8"?>
 <p:sld xmlns:a="http://schemas.openxmlformats.org/drawingml/2006/main" xmlns:r="http://schemas.openxmlformats.org/officeDocument/2006/relationships" xmlns:p="http://schemas.openxmlformats.org/presentationml/2006/main">
   <p:cSld>
     <p:spTree>
@@ -13366,7 +13927,7 @@
             </a:pPr>
             <a:r>
               <a:rPr lang="en-US" dirty="0"/>
-              <a:t>The instructions used old version. </a:t>
+              <a:t>The instructions used old library version. </a:t>
             </a:r>
             <a:r>
               <a:rPr lang="en-US" b="1" dirty="0">
@@ -13664,7 +14225,7 @@
             <a:fld id="{D57F1E4F-1CFF-5643-939E-217C01CDF565}" type="slidenum">
               <a:rPr lang="en-US" smtClean="0"/>
               <a:pPr/>
-              <a:t>22</a:t>
+              <a:t>23</a:t>
             </a:fld>
             <a:endParaRPr lang="en-US" dirty="0"/>
           </a:p>
@@ -13683,7 +14244,7 @@
 </p:sld>
 </file>
 
-<file path=ppt/slides/slide23.xml><?xml version="1.0" encoding="utf-8"?>
+<file path=ppt/slides/slide24.xml><?xml version="1.0" encoding="utf-8"?>
 <p:sld xmlns:a="http://schemas.openxmlformats.org/drawingml/2006/main" xmlns:r="http://schemas.openxmlformats.org/officeDocument/2006/relationships" xmlns:p="http://schemas.openxmlformats.org/presentationml/2006/main">
   <p:cSld>
     <p:spTree>
@@ -13798,7 +14359,21 @@
             </a:pPr>
             <a:r>
               <a:rPr lang="en-US" dirty="0"/>
-              <a:t>Added a “CRITICAL” keyword, so that important steps are not missed </a:t>
+              <a:t>Added a “</a:t>
+            </a:r>
+            <a:r>
+              <a:rPr lang="en-US" b="1" dirty="0">
+                <a:solidFill>
+                  <a:schemeClr val="accent2">
+                    <a:lumMod val="75000"/>
+                  </a:schemeClr>
+                </a:solidFill>
+              </a:rPr>
+              <a:t>CRITICAL</a:t>
+            </a:r>
+            <a:r>
+              <a:rPr lang="en-US" dirty="0"/>
+              <a:t>” keyword, so that important steps are not missed </a:t>
             </a:r>
           </a:p>
           <a:p>
@@ -13967,7 +14542,7 @@
           <a:p>
             <a:r>
               <a:rPr lang="en-US" sz="3000" dirty="0"/>
-              <a:t>Lessons Learned – Shell –Key Words - Guidance</a:t>
+              <a:t>Lessons Learned – Shell – Key Words - Guidance</a:t>
             </a:r>
             <a:endParaRPr lang="en-GB" sz="3000" dirty="0"/>
           </a:p>
@@ -14029,7 +14604,7 @@
             <a:fld id="{D57F1E4F-1CFF-5643-939E-217C01CDF565}" type="slidenum">
               <a:rPr lang="en-US" smtClean="0"/>
               <a:pPr/>
-              <a:t>23</a:t>
+              <a:t>24</a:t>
             </a:fld>
             <a:endParaRPr lang="en-US" dirty="0"/>
           </a:p>
@@ -14048,7 +14623,7 @@
 </p:sld>
 </file>
 
-<file path=ppt/slides/slide24.xml><?xml version="1.0" encoding="utf-8"?>
+<file path=ppt/slides/slide25.xml><?xml version="1.0" encoding="utf-8"?>
 <p:sld xmlns:a="http://schemas.openxmlformats.org/drawingml/2006/main" xmlns:r="http://schemas.openxmlformats.org/officeDocument/2006/relationships" xmlns:p="http://schemas.openxmlformats.org/presentationml/2006/main">
   <p:cSld>
     <p:spTree>
@@ -14284,7 +14859,7 @@
             <a:fld id="{D57F1E4F-1CFF-5643-939E-217C01CDF565}" type="slidenum">
               <a:rPr lang="en-US" smtClean="0"/>
               <a:pPr/>
-              <a:t>24</a:t>
+              <a:t>25</a:t>
             </a:fld>
             <a:endParaRPr lang="en-US" dirty="0"/>
           </a:p>
@@ -14303,7 +14878,7 @@
 </p:sld>
 </file>
 
-<file path=ppt/slides/slide25.xml><?xml version="1.0" encoding="utf-8"?>
+<file path=ppt/slides/slide26.xml><?xml version="1.0" encoding="utf-8"?>
 <p:sld xmlns:a="http://schemas.openxmlformats.org/drawingml/2006/main" xmlns:r="http://schemas.openxmlformats.org/officeDocument/2006/relationships" xmlns:p="http://schemas.openxmlformats.org/presentationml/2006/main">
   <p:cSld>
     <p:spTree>
@@ -14578,7 +15153,7 @@
             <a:fld id="{D57F1E4F-1CFF-5643-939E-217C01CDF565}" type="slidenum">
               <a:rPr lang="en-US" smtClean="0"/>
               <a:pPr/>
-              <a:t>25</a:t>
+              <a:t>26</a:t>
             </a:fld>
             <a:endParaRPr lang="en-US" dirty="0"/>
           </a:p>
@@ -14597,7 +15172,7 @@
 </p:sld>
 </file>
 
-<file path=ppt/slides/slide26.xml><?xml version="1.0" encoding="utf-8"?>
+<file path=ppt/slides/slide27.xml><?xml version="1.0" encoding="utf-8"?>
 <p:sld xmlns:a="http://schemas.openxmlformats.org/drawingml/2006/main" xmlns:r="http://schemas.openxmlformats.org/officeDocument/2006/relationships" xmlns:p="http://schemas.openxmlformats.org/presentationml/2006/main">
   <p:cSld>
     <p:spTree>
@@ -14851,7 +15426,7 @@
             <a:fld id="{D57F1E4F-1CFF-5643-939E-217C01CDF565}" type="slidenum">
               <a:rPr lang="en-US" smtClean="0"/>
               <a:pPr/>
-              <a:t>26</a:t>
+              <a:t>27</a:t>
             </a:fld>
             <a:endParaRPr lang="en-US" dirty="0"/>
           </a:p>
@@ -15026,7 +15601,7 @@
             </a:pPr>
             <a:r>
               <a:rPr lang="en-US" sz="1600" dirty="0"/>
-              <a:t>Need thousands of lines of instructions, best practice, org specific conventions</a:t>
+              <a:t>Need thousands of lines of instructions related to architecture, design, config</a:t>
             </a:r>
           </a:p>
           <a:p>
@@ -15268,7 +15843,7 @@
             </a:pPr>
             <a:r>
               <a:rPr lang="en-US" sz="2000" dirty="0"/>
-              <a:t>The limitations of the above prompt:</a:t>
+              <a:t>Limitations of one-line prompt:</a:t>
             </a:r>
           </a:p>
           <a:p>
@@ -15316,7 +15891,7 @@
             </a:pPr>
             <a:r>
               <a:rPr lang="en-US" sz="1800" dirty="0"/>
-              <a:t>Organization-specific requirements like </a:t>
+              <a:t>Organization-specific requirements like</a:t>
             </a:r>
           </a:p>
           <a:p>
@@ -15546,7 +16121,7 @@
             </a:pPr>
             <a:r>
               <a:rPr lang="en-US" sz="2000" dirty="0"/>
-              <a:t>Not only upgrade – install JDK</a:t>
+              <a:t>Not only upgrade – but install JDK</a:t>
             </a:r>
           </a:p>
           <a:p>
@@ -15565,8 +16140,8 @@
               <a:buChar char="v"/>
             </a:pPr>
             <a:r>
-              <a:rPr lang="en-US" sz="1800" dirty="0"/>
-              <a:t>Install under directory with permissions</a:t>
+              <a:rPr lang="en-US" sz="1800" b="1" dirty="0"/>
+              <a:t>Install JDK under directory with permissions</a:t>
             </a:r>
           </a:p>
           <a:p>
@@ -15779,7 +16354,7 @@
         </p:spPr>
         <p:txBody>
           <a:bodyPr>
-            <a:normAutofit lnSpcReduction="10000"/>
+            <a:normAutofit fontScale="92500" lnSpcReduction="10000"/>
           </a:bodyPr>
           <a:lstStyle/>
           <a:p>
@@ -15789,7 +16364,17 @@
             </a:pPr>
             <a:r>
               <a:rPr lang="en-US" sz="2000" dirty="0"/>
-              <a:t>Very active community based automated refactoring framework</a:t>
+              <a:t>Very active community based </a:t>
+            </a:r>
+            <a:r>
+              <a:rPr lang="en-US" sz="2000" b="1" dirty="0">
+                <a:solidFill>
+                  <a:schemeClr val="accent2">
+                    <a:lumMod val="75000"/>
+                  </a:schemeClr>
+                </a:solidFill>
+              </a:rPr>
+              <a:t>automated refactoring framework</a:t>
             </a:r>
           </a:p>
           <a:p>
@@ -15815,7 +16400,7 @@
                   </a:schemeClr>
                 </a:solidFill>
               </a:rPr>
-              <a:t>Java 17 upgrade Recipe - org.openrewrite.java.migrate.UpgradeToJava17</a:t>
+              <a:t>Java 21 upgrade Recipe - org.openrewrite.java.migrate.UpgradeToJava21</a:t>
             </a:r>
           </a:p>
           <a:p>
@@ -15824,10 +16409,52 @@
               <a:buChar char="v"/>
             </a:pPr>
             <a:r>
-              <a:rPr lang="en-US" sz="1800" dirty="0" err="1"/>
+              <a:rPr lang="en-US" sz="1800" b="1" dirty="0">
+                <a:solidFill>
+                  <a:schemeClr val="accent2">
+                    <a:lumMod val="75000"/>
+                  </a:schemeClr>
+                </a:solidFill>
+              </a:rPr>
+              <a:t>Recipes to Use New Language Features</a:t>
+            </a:r>
+          </a:p>
+          <a:p>
+            <a:pPr lvl="2">
+              <a:buFont typeface="Wingdings" pitchFamily="2" charset="2"/>
+              <a:buChar char="v"/>
+            </a:pPr>
+            <a:r>
+              <a:rPr lang="en-US" sz="1600" dirty="0" err="1"/>
               <a:t>org.openrewrite.java.migrate.jakarta.JavaxToJakarta</a:t>
             </a:r>
-            <a:endParaRPr lang="en-US" sz="1800" dirty="0"/>
+            <a:endParaRPr lang="en-US" sz="1600" dirty="0"/>
+          </a:p>
+          <a:p>
+            <a:pPr lvl="3">
+              <a:buFont typeface="Wingdings" pitchFamily="2" charset="2"/>
+              <a:buChar char="v"/>
+            </a:pPr>
+            <a:r>
+              <a:rPr lang="en-US" sz="1400" dirty="0"/>
+              <a:t>Change all “</a:t>
+            </a:r>
+            <a:r>
+              <a:rPr lang="en-US" sz="1400" dirty="0" err="1"/>
+              <a:t>javax</a:t>
+            </a:r>
+            <a:r>
+              <a:rPr lang="en-US" sz="1400" dirty="0"/>
+              <a:t>.*” to “</a:t>
+            </a:r>
+            <a:r>
+              <a:rPr lang="en-US" sz="1400" dirty="0" err="1"/>
+              <a:t>jakarta</a:t>
+            </a:r>
+            <a:r>
+              <a:rPr lang="en-US" sz="1400" dirty="0"/>
+              <a:t>.*”</a:t>
+            </a:r>
           </a:p>
           <a:p>
             <a:pPr lvl="2">
@@ -15835,77 +16462,51 @@
               <a:buChar char="v"/>
             </a:pPr>
             <a:r>
+              <a:rPr lang="en-US" sz="1600" dirty="0" err="1"/>
+              <a:t>org.openrewrite.java.migrate.SwitchPatternMatching</a:t>
+            </a:r>
+            <a:endParaRPr lang="en-US" sz="1600" dirty="0"/>
+          </a:p>
+          <a:p>
+            <a:pPr lvl="3">
+              <a:buFont typeface="Wingdings" pitchFamily="2" charset="2"/>
+              <a:buChar char="v"/>
+            </a:pPr>
+            <a:r>
+              <a:rPr lang="en-US" sz="1400" dirty="0"/>
+              <a:t>Use new pattern matching feature</a:t>
+            </a:r>
+          </a:p>
+          <a:p>
+            <a:pPr lvl="2">
+              <a:buFont typeface="Wingdings" pitchFamily="2" charset="2"/>
+              <a:buChar char="v"/>
+            </a:pPr>
+            <a:r>
               <a:rPr lang="en-US" sz="1600" dirty="0"/>
-              <a:t>Change all “</a:t>
+              <a:t>Use </a:t>
             </a:r>
             <a:r>
               <a:rPr lang="en-US" sz="1600" dirty="0" err="1"/>
-              <a:t>javax</a:t>
+              <a:t>UseVarForGenericsConstructors</a:t>
             </a:r>
             <a:r>
               <a:rPr lang="en-US" sz="1600" dirty="0"/>
-              <a:t>.*” to “</a:t>
+              <a:t>, </a:t>
             </a:r>
             <a:r>
               <a:rPr lang="en-US" sz="1600" dirty="0" err="1"/>
-              <a:t>jakarta</a:t>
+              <a:t>LombokValueToRecord</a:t>
             </a:r>
             <a:r>
               <a:rPr lang="en-US" sz="1600" dirty="0"/>
-              <a:t>.*”</a:t>
-            </a:r>
-          </a:p>
-          <a:p>
-            <a:pPr lvl="1">
-              <a:buFont typeface="Wingdings" pitchFamily="2" charset="2"/>
-              <a:buChar char="v"/>
-            </a:pPr>
-            <a:r>
-              <a:rPr lang="en-US" sz="1800" dirty="0" err="1"/>
-              <a:t>org.openrewrite.java.migrate.SwitchPatternMatching</a:t>
-            </a:r>
-            <a:endParaRPr lang="en-US" sz="1800" dirty="0"/>
-          </a:p>
-          <a:p>
-            <a:pPr lvl="2">
-              <a:buFont typeface="Wingdings" pitchFamily="2" charset="2"/>
-              <a:buChar char="v"/>
-            </a:pPr>
-            <a:r>
-              <a:rPr lang="en-US" sz="1600" dirty="0"/>
-              <a:t>Use new pattern matching feature</a:t>
-            </a:r>
-          </a:p>
-          <a:p>
-            <a:pPr lvl="1">
-              <a:buFont typeface="Wingdings" pitchFamily="2" charset="2"/>
-              <a:buChar char="v"/>
-            </a:pPr>
-            <a:r>
-              <a:rPr lang="en-US" sz="1800" dirty="0"/>
-              <a:t>Use </a:t>
-            </a:r>
-            <a:r>
-              <a:rPr lang="en-US" sz="1800" dirty="0" err="1"/>
-              <a:t>UseVarForGenericsConstructors</a:t>
-            </a:r>
-            <a:r>
-              <a:rPr lang="en-US" sz="1800" dirty="0"/>
               <a:t>, </a:t>
             </a:r>
             <a:r>
-              <a:rPr lang="en-US" sz="1800" dirty="0" err="1"/>
-              <a:t>LombokValueToRecord</a:t>
-            </a:r>
-            <a:r>
-              <a:rPr lang="en-US" sz="1800" dirty="0"/>
-              <a:t>, </a:t>
-            </a:r>
-            <a:r>
-              <a:rPr lang="en-US" sz="1800" dirty="0" err="1"/>
+              <a:rPr lang="en-US" sz="1600" dirty="0" err="1"/>
               <a:t>ifelseifconstructtoswitch</a:t>
             </a:r>
-            <a:endParaRPr lang="en-US" sz="1800" dirty="0"/>
+            <a:endParaRPr lang="en-US" sz="1600" dirty="0"/>
           </a:p>
           <a:p>
             <a:pPr>
@@ -15913,8 +16514,18 @@
               <a:buChar char="v"/>
             </a:pPr>
             <a:r>
+              <a:rPr lang="en-US" sz="2000" b="1" dirty="0">
+                <a:solidFill>
+                  <a:schemeClr val="accent2">
+                    <a:lumMod val="75000"/>
+                  </a:schemeClr>
+                </a:solidFill>
+              </a:rPr>
+              <a:t>Composite Recipes</a:t>
+            </a:r>
+            <a:r>
               <a:rPr lang="en-US" sz="2000" dirty="0"/>
-              <a:t>Composite Recipes - bundles multiple recipes into one</a:t>
+              <a:t> - bundles multiple recipes into one</a:t>
             </a:r>
           </a:p>
           <a:p>
@@ -15924,7 +16535,7 @@
             </a:pPr>
             <a:r>
               <a:rPr lang="en-US" sz="2000" dirty="0"/>
-              <a:t>Limited Recipes for other programming languages</a:t>
+              <a:t>Limited recipes for other programming languages</a:t>
             </a:r>
           </a:p>
           <a:p>
@@ -16012,7 +16623,7 @@
           <a:p>
             <a:r>
               <a:rPr lang="en-US" sz="2400" dirty="0"/>
-              <a:t>Approach 1: Open Rewrite – Refactoring Framework</a:t>
+              <a:t>Java Upgrade Approach 1: Open Rewrite – Refactoring Framework</a:t>
             </a:r>
             <a:endParaRPr lang="en-GB" sz="2400" dirty="0"/>
           </a:p>
@@ -16501,7 +17112,7 @@
         <p:spPr>
           <a:xfrm>
             <a:off x="690132" y="5498969"/>
-            <a:ext cx="8593472" cy="830997"/>
+            <a:ext cx="8593472" cy="584775"/>
           </a:xfrm>
           <a:prstGeom prst="rect">
             <a:avLst/>
@@ -16562,19 +17173,8 @@
               <a:rPr lang="en-US" sz="1600" dirty="0">
                 <a:latin typeface=""/>
               </a:rPr>
-              <a:t>=org.openrewrite.java.migrate.UpgradeToJava21,\</a:t>
-            </a:r>
-          </a:p>
-          <a:p>
-            <a:r>
-              <a:rPr lang="en-US" sz="1600" dirty="0" err="1">
-                <a:latin typeface=""/>
-              </a:rPr>
-              <a:t>org.openrewrite.java.migrate.SwitchPatternMatching</a:t>
-            </a:r>
-            <a:endParaRPr lang="en-US" sz="1600" dirty="0">
-              <a:latin typeface=""/>
-            </a:endParaRPr>
+              <a:t>=org.openrewrite.java.migrate.UpgradeToJava21</a:t>
+            </a:r>
           </a:p>
         </p:txBody>
       </p:sp>
@@ -17195,7 +17795,7 @@
             </a:pPr>
             <a:r>
               <a:rPr lang="en-US" sz="2000" dirty="0"/>
-              <a:t>Examples: Amazon Q Developer, Copilot App Modernization</a:t>
+              <a:t>Examples: Amazon Q Developer, Copilot App Modernization, Moderne AI</a:t>
             </a:r>
           </a:p>
           <a:p>
@@ -17347,7 +17947,7 @@
           <a:p>
             <a:r>
               <a:rPr lang="en-US" sz="2400" dirty="0"/>
-              <a:t>Approach 2: AI Agents for Java Upgrade</a:t>
+              <a:t>Java Upgrade Approach 2: AI Agents for Java Upgrade</a:t>
             </a:r>
             <a:endParaRPr lang="en-GB" sz="2400" dirty="0"/>
           </a:p>
